--- a/docs/地缘风险_产品介绍PPT_20260908.pptx
+++ b/docs/地缘风险_产品介绍PPT_20260908.pptx
@@ -2,28 +2,28 @@
 <file path=ppt/presentation.xml><?xml version="1.0" encoding="utf-8"?>
 <p:presentation xmlns:p="http://schemas.openxmlformats.org/presentationml/2006/main">
   <p:sldMasterIdLst>
-    <p:sldMasterId xmlns:r="http://schemas.openxmlformats.org/officeDocument/2006/relationships" id="2147483648" r:id="R3461e13c77714862"/>
+    <p:sldMasterId xmlns:r="http://schemas.openxmlformats.org/officeDocument/2006/relationships" id="2147483648" r:id="R8e8c4a2879294b6d"/>
   </p:sldMasterIdLst>
   <p:notesMasterIdLst>
-    <p:notesMasterId xmlns:r="http://schemas.openxmlformats.org/officeDocument/2006/relationships" r:id="Rdfc93f9daae946c2"/>
+    <p:notesMasterId xmlns:r="http://schemas.openxmlformats.org/officeDocument/2006/relationships" r:id="R41e51f05b47e428e"/>
   </p:notesMasterIdLst>
   <p:sldIdLst>
-    <p:sldId xmlns:r="http://schemas.openxmlformats.org/officeDocument/2006/relationships" id="256" r:id="R44283e3a6d0241b5"/>
-    <p:sldId xmlns:r="http://schemas.openxmlformats.org/officeDocument/2006/relationships" id="257" r:id="R4e214031521f4e83"/>
-    <p:sldId xmlns:r="http://schemas.openxmlformats.org/officeDocument/2006/relationships" id="258" r:id="R49f220ca40d444d7"/>
-    <p:sldId xmlns:r="http://schemas.openxmlformats.org/officeDocument/2006/relationships" id="259" r:id="R13aade418a79436a"/>
-    <p:sldId xmlns:r="http://schemas.openxmlformats.org/officeDocument/2006/relationships" id="260" r:id="R03fb8ff6003a4c4c"/>
-    <p:sldId xmlns:r="http://schemas.openxmlformats.org/officeDocument/2006/relationships" id="261" r:id="R51401a9645d2456f"/>
-    <p:sldId xmlns:r="http://schemas.openxmlformats.org/officeDocument/2006/relationships" id="262" r:id="R54e72fbbedb34a38"/>
-    <p:sldId xmlns:r="http://schemas.openxmlformats.org/officeDocument/2006/relationships" id="263" r:id="R19fceca0eeae4cc6"/>
-    <p:sldId xmlns:r="http://schemas.openxmlformats.org/officeDocument/2006/relationships" id="264" r:id="Rd326cda5622f4fb7"/>
-    <p:sldId xmlns:r="http://schemas.openxmlformats.org/officeDocument/2006/relationships" id="265" r:id="Re363017372d4486f"/>
-    <p:sldId xmlns:r="http://schemas.openxmlformats.org/officeDocument/2006/relationships" id="266" r:id="R59e500678ea84f49"/>
-    <p:sldId xmlns:r="http://schemas.openxmlformats.org/officeDocument/2006/relationships" id="267" r:id="R90a6e9abf9f74d6e"/>
-    <p:sldId xmlns:r="http://schemas.openxmlformats.org/officeDocument/2006/relationships" id="268" r:id="Rf1fcd2ad92a94055"/>
-    <p:sldId xmlns:r="http://schemas.openxmlformats.org/officeDocument/2006/relationships" id="269" r:id="R2be18e480acd4685"/>
-    <p:sldId xmlns:r="http://schemas.openxmlformats.org/officeDocument/2006/relationships" id="270" r:id="R4dfbe01f70d04adb"/>
-    <p:sldId xmlns:r="http://schemas.openxmlformats.org/officeDocument/2006/relationships" id="271" r:id="Rc2d3b9cbb313441c"/>
+    <p:sldId xmlns:r="http://schemas.openxmlformats.org/officeDocument/2006/relationships" id="256" r:id="Rfe493e5c331b49ef"/>
+    <p:sldId xmlns:r="http://schemas.openxmlformats.org/officeDocument/2006/relationships" id="257" r:id="R74edf13dd7004182"/>
+    <p:sldId xmlns:r="http://schemas.openxmlformats.org/officeDocument/2006/relationships" id="258" r:id="R229b83dad82d4662"/>
+    <p:sldId xmlns:r="http://schemas.openxmlformats.org/officeDocument/2006/relationships" id="259" r:id="Rb2236ac36c554a8a"/>
+    <p:sldId xmlns:r="http://schemas.openxmlformats.org/officeDocument/2006/relationships" id="260" r:id="R54ca860b47384052"/>
+    <p:sldId xmlns:r="http://schemas.openxmlformats.org/officeDocument/2006/relationships" id="261" r:id="R18458a571b3942f3"/>
+    <p:sldId xmlns:r="http://schemas.openxmlformats.org/officeDocument/2006/relationships" id="262" r:id="Rb67fe6a584b640d1"/>
+    <p:sldId xmlns:r="http://schemas.openxmlformats.org/officeDocument/2006/relationships" id="263" r:id="R671a9b72c486410e"/>
+    <p:sldId xmlns:r="http://schemas.openxmlformats.org/officeDocument/2006/relationships" id="264" r:id="Rcc041793037140d2"/>
+    <p:sldId xmlns:r="http://schemas.openxmlformats.org/officeDocument/2006/relationships" id="265" r:id="R094a830a3a714aba"/>
+    <p:sldId xmlns:r="http://schemas.openxmlformats.org/officeDocument/2006/relationships" id="266" r:id="R786a9a78c3fb4a9a"/>
+    <p:sldId xmlns:r="http://schemas.openxmlformats.org/officeDocument/2006/relationships" id="267" r:id="R33aea50eae3f483f"/>
+    <p:sldId xmlns:r="http://schemas.openxmlformats.org/officeDocument/2006/relationships" id="268" r:id="Rd7f4060703d84808"/>
+    <p:sldId xmlns:r="http://schemas.openxmlformats.org/officeDocument/2006/relationships" id="269" r:id="R0aeddaf934404387"/>
+    <p:sldId xmlns:r="http://schemas.openxmlformats.org/officeDocument/2006/relationships" id="270" r:id="R93b753a38aab430a"/>
+    <p:sldId xmlns:r="http://schemas.openxmlformats.org/officeDocument/2006/relationships" id="271" r:id="Rbf6bccac5b91432d"/>
   </p:sldIdLst>
   <p:sldSz cx="12192000" cy="6858000"/>
   <p:notesSz cx="6858000" cy="9144000"/>
@@ -1650,7 +1650,7 @@
   </p:cSld>
   <p:clrMap bg1="lt1" tx1="dk1" bg2="lt2" tx2="dk2" accent1="accent1" accent2="accent2" accent3="accent3" accent4="accent4" accent5="accent5" accent6="accent6" hlink="hlink" folHlink="folHlink"/>
   <p:sldLayoutIdLst>
-    <p:sldLayoutId xmlns:r="http://schemas.openxmlformats.org/officeDocument/2006/relationships" id="2147483649" r:id="R550914f27d3847a5"/>
+    <p:sldLayoutId xmlns:r="http://schemas.openxmlformats.org/officeDocument/2006/relationships" id="2147483649" r:id="R4617e1207be74012"/>
   </p:sldLayoutIdLst>
   <p:txStyles>
     <p:titleStyle>
@@ -2201,7 +2201,7 @@
           <p:cNvPr id="7" name="">
             <a:extLst xmlns:a="http://schemas.openxmlformats.org/drawingml/2006/main">
               <a:ext uri="{FF2B5EF4-FFF2-40B4-BE49-F238E27FC236}">
-                <a16:creationId xmlns:a16="http://schemas.microsoft.com/office/drawing/2014/main" id="{C89914F1-B524-43D1-980D-A759947BC086}"/>
+                <a16:creationId xmlns:a16="http://schemas.microsoft.com/office/drawing/2014/main" id="{8D945EAD-D2ED-4C6B-9506-0DD736F1B3A3}"/>
               </a:ext>
             </a:extLst>
           </p:cNvPr>
@@ -2263,7 +2263,7 @@
           <p:cNvPr id="2" name="">
             <a:extLst xmlns:a="http://schemas.openxmlformats.org/drawingml/2006/main">
               <a:ext uri="{FF2B5EF4-FFF2-40B4-BE49-F238E27FC236}">
-                <a16:creationId xmlns:a16="http://schemas.microsoft.com/office/drawing/2014/main" id="{6F97A065-A93E-411C-AF20-10ACBA12D946}"/>
+                <a16:creationId xmlns:a16="http://schemas.microsoft.com/office/drawing/2014/main" id="{ACBACDC0-8DC5-4C1B-BD89-5B64B7C94792}"/>
               </a:ext>
             </a:extLst>
           </p:cNvPr>
@@ -2325,7 +2325,7 @@
           <p:cNvPr id="3" name="">
             <a:extLst xmlns:a="http://schemas.openxmlformats.org/drawingml/2006/main">
               <a:ext uri="{FF2B5EF4-FFF2-40B4-BE49-F238E27FC236}">
-                <a16:creationId xmlns:a16="http://schemas.microsoft.com/office/drawing/2014/main" id="{A967F089-2024-4F89-91DD-E40A5D0C40AC}"/>
+                <a16:creationId xmlns:a16="http://schemas.microsoft.com/office/drawing/2014/main" id="{636CE62F-442F-49C9-97F4-90B06CA352A4}"/>
               </a:ext>
             </a:extLst>
           </p:cNvPr>
@@ -2356,7 +2356,7 @@
           <p:cNvPr id="4" name="">
             <a:extLst xmlns:a="http://schemas.openxmlformats.org/drawingml/2006/main">
               <a:ext uri="{FF2B5EF4-FFF2-40B4-BE49-F238E27FC236}">
-                <a16:creationId xmlns:a16="http://schemas.microsoft.com/office/drawing/2014/main" id="{05DE830E-14B4-4407-B685-D9DF76CB43BB}"/>
+                <a16:creationId xmlns:a16="http://schemas.microsoft.com/office/drawing/2014/main" id="{124FCC9F-9E94-40D7-8A98-69B394144685}"/>
               </a:ext>
             </a:extLst>
           </p:cNvPr>
@@ -2418,7 +2418,7 @@
           <p:cNvPr id="5" name="">
             <a:extLst xmlns:a="http://schemas.openxmlformats.org/drawingml/2006/main">
               <a:ext uri="{FF2B5EF4-FFF2-40B4-BE49-F238E27FC236}">
-                <a16:creationId xmlns:a16="http://schemas.microsoft.com/office/drawing/2014/main" id="{7168D0BD-1C9F-49F0-87F8-1BC5A4F097E4}"/>
+                <a16:creationId xmlns:a16="http://schemas.microsoft.com/office/drawing/2014/main" id="{B8750E25-9127-45BB-AA9E-9821AEA1809B}"/>
               </a:ext>
             </a:extLst>
           </p:cNvPr>
@@ -2480,7 +2480,7 @@
           <p:cNvPr id="6" name="">
             <a:extLst xmlns:a="http://schemas.openxmlformats.org/drawingml/2006/main">
               <a:ext uri="{FF2B5EF4-FFF2-40B4-BE49-F238E27FC236}">
-                <a16:creationId xmlns:a16="http://schemas.microsoft.com/office/drawing/2014/main" id="{5BFB273D-53D8-4A62-81DB-F0EBF83A56C7}"/>
+                <a16:creationId xmlns:a16="http://schemas.microsoft.com/office/drawing/2014/main" id="{AD4C2E3A-DC83-446C-8891-9AA43ABCEDAD}"/>
               </a:ext>
             </a:extLst>
           </p:cNvPr>
@@ -2540,7 +2540,7 @@
     </p:spTree>
     <p:extLst>
       <p:ext uri="{BB962C8B-B14F-4D97-AF65-F5344CB8AC3E}">
-        <p14:creationId xmlns:p14="http://schemas.microsoft.com/office/powerpoint/2010/main" val="238205075"/>
+        <p14:creationId xmlns:p14="http://schemas.microsoft.com/office/powerpoint/2010/main" val="862836099"/>
       </p:ext>
     </p:extLst>
   </p:cSld>
@@ -2571,7 +2571,7 @@
           <p:cNvPr id="7" name="">
             <a:extLst xmlns:a="http://schemas.openxmlformats.org/drawingml/2006/main">
               <a:ext uri="{FF2B5EF4-FFF2-40B4-BE49-F238E27FC236}">
-                <a16:creationId xmlns:a16="http://schemas.microsoft.com/office/drawing/2014/main" id="{66A3E7CD-54B3-44D1-BDF4-72F7D242CEB2}"/>
+                <a16:creationId xmlns:a16="http://schemas.microsoft.com/office/drawing/2014/main" id="{7669551A-B28C-4302-9161-AD3D6460C8B1}"/>
               </a:ext>
             </a:extLst>
           </p:cNvPr>
@@ -2633,7 +2633,7 @@
           <p:cNvPr id="2" name="">
             <a:extLst xmlns:a="http://schemas.openxmlformats.org/drawingml/2006/main">
               <a:ext uri="{FF2B5EF4-FFF2-40B4-BE49-F238E27FC236}">
-                <a16:creationId xmlns:a16="http://schemas.microsoft.com/office/drawing/2014/main" id="{83421C1E-60B8-45A7-BDCB-F13B86581A75}"/>
+                <a16:creationId xmlns:a16="http://schemas.microsoft.com/office/drawing/2014/main" id="{720A677F-895F-46EB-A102-41DF0A6B69BE}"/>
               </a:ext>
             </a:extLst>
           </p:cNvPr>
@@ -2664,7 +2664,7 @@
           <p:cNvPr id="3" name="">
             <a:extLst xmlns:a="http://schemas.openxmlformats.org/drawingml/2006/main">
               <a:ext uri="{FF2B5EF4-FFF2-40B4-BE49-F238E27FC236}">
-                <a16:creationId xmlns:a16="http://schemas.microsoft.com/office/drawing/2014/main" id="{75C0C5C3-92CF-4556-9AD3-649EF0E0C933}"/>
+                <a16:creationId xmlns:a16="http://schemas.microsoft.com/office/drawing/2014/main" id="{8858C12C-EE15-4F5A-B219-080A412E3211}"/>
               </a:ext>
             </a:extLst>
           </p:cNvPr>
@@ -2726,7 +2726,7 @@
           <p:cNvPr id="4" name="">
             <a:extLst xmlns:a="http://schemas.openxmlformats.org/drawingml/2006/main">
               <a:ext uri="{FF2B5EF4-FFF2-40B4-BE49-F238E27FC236}">
-                <a16:creationId xmlns:a16="http://schemas.microsoft.com/office/drawing/2014/main" id="{DCCC1CD7-76D1-4D44-A891-6825F8E75A3E}"/>
+                <a16:creationId xmlns:a16="http://schemas.microsoft.com/office/drawing/2014/main" id="{5841BB93-A530-40C3-B768-C7DA512950E9}"/>
               </a:ext>
             </a:extLst>
           </p:cNvPr>
@@ -2885,7 +2885,7 @@
           <p:nvPr/>
         </p:nvPicPr>
         <p:blipFill>
-          <a:blip xmlns:r="http://schemas.openxmlformats.org/officeDocument/2006/relationships" xmlns:a="http://schemas.openxmlformats.org/drawingml/2006/main" r:embed="R521c7bc9f441441e"/>
+          <a:blip xmlns:r="http://schemas.openxmlformats.org/officeDocument/2006/relationships" xmlns:a="http://schemas.openxmlformats.org/drawingml/2006/main" r:embed="R81455b9ef2d5485e"/>
           <a:stretch xmlns:a="http://schemas.openxmlformats.org/drawingml/2006/main"/>
         </p:blipFill>
         <p:spPr>
@@ -2905,7 +2905,7 @@
           <p:cNvPr id="6" name="">
             <a:extLst xmlns:a="http://schemas.openxmlformats.org/drawingml/2006/main">
               <a:ext uri="{FF2B5EF4-FFF2-40B4-BE49-F238E27FC236}">
-                <a16:creationId xmlns:a16="http://schemas.microsoft.com/office/drawing/2014/main" id="{375293BD-2001-41AA-A6CF-99982302DACA}"/>
+                <a16:creationId xmlns:a16="http://schemas.microsoft.com/office/drawing/2014/main" id="{5D8ACEB4-8644-462A-86D0-78AA086E4C53}"/>
               </a:ext>
             </a:extLst>
           </p:cNvPr>
@@ -2965,7 +2965,7 @@
     </p:spTree>
     <p:extLst>
       <p:ext uri="{BB962C8B-B14F-4D97-AF65-F5344CB8AC3E}">
-        <p14:creationId xmlns:p14="http://schemas.microsoft.com/office/powerpoint/2010/main" val="1121234585"/>
+        <p14:creationId xmlns:p14="http://schemas.microsoft.com/office/powerpoint/2010/main" val="71328252"/>
       </p:ext>
     </p:extLst>
   </p:cSld>
@@ -2996,7 +2996,7 @@
           <p:cNvPr id="8" name="">
             <a:extLst xmlns:a="http://schemas.openxmlformats.org/drawingml/2006/main">
               <a:ext uri="{FF2B5EF4-FFF2-40B4-BE49-F238E27FC236}">
-                <a16:creationId xmlns:a16="http://schemas.microsoft.com/office/drawing/2014/main" id="{E6D81EA1-F24C-45B7-A5F3-E0F54FB7A17C}"/>
+                <a16:creationId xmlns:a16="http://schemas.microsoft.com/office/drawing/2014/main" id="{938C824D-6A94-4EFB-A9E3-3EDD00E113BC}"/>
               </a:ext>
             </a:extLst>
           </p:cNvPr>
@@ -3058,7 +3058,7 @@
           <p:cNvPr id="2" name="">
             <a:extLst xmlns:a="http://schemas.openxmlformats.org/drawingml/2006/main">
               <a:ext uri="{FF2B5EF4-FFF2-40B4-BE49-F238E27FC236}">
-                <a16:creationId xmlns:a16="http://schemas.microsoft.com/office/drawing/2014/main" id="{D4A154FE-2EF6-4B65-908C-E63BB2BBFEF4}"/>
+                <a16:creationId xmlns:a16="http://schemas.microsoft.com/office/drawing/2014/main" id="{B8524A08-D94F-4016-82B2-51495CF8FDAD}"/>
               </a:ext>
             </a:extLst>
           </p:cNvPr>
@@ -3089,7 +3089,7 @@
           <p:cNvPr id="3" name="">
             <a:extLst xmlns:a="http://schemas.openxmlformats.org/drawingml/2006/main">
               <a:ext uri="{FF2B5EF4-FFF2-40B4-BE49-F238E27FC236}">
-                <a16:creationId xmlns:a16="http://schemas.microsoft.com/office/drawing/2014/main" id="{2B7980B5-91AC-4BCD-8641-72CF3377D40A}"/>
+                <a16:creationId xmlns:a16="http://schemas.microsoft.com/office/drawing/2014/main" id="{F9AF7682-D79C-4A8A-80D2-079B90601445}"/>
               </a:ext>
             </a:extLst>
           </p:cNvPr>
@@ -3151,7 +3151,7 @@
           <p:cNvPr id="4" name="">
             <a:extLst xmlns:a="http://schemas.openxmlformats.org/drawingml/2006/main">
               <a:ext uri="{FF2B5EF4-FFF2-40B4-BE49-F238E27FC236}">
-                <a16:creationId xmlns:a16="http://schemas.microsoft.com/office/drawing/2014/main" id="{E405A421-3579-4735-9D6C-60634F751F92}"/>
+                <a16:creationId xmlns:a16="http://schemas.microsoft.com/office/drawing/2014/main" id="{99CBE0BD-BC09-42E1-9368-5A2BC919B612}"/>
               </a:ext>
             </a:extLst>
           </p:cNvPr>
@@ -3213,7 +3213,7 @@
           <p:cNvPr id="5" name="">
             <a:extLst xmlns:a="http://schemas.openxmlformats.org/drawingml/2006/main">
               <a:ext uri="{FF2B5EF4-FFF2-40B4-BE49-F238E27FC236}">
-                <a16:creationId xmlns:a16="http://schemas.microsoft.com/office/drawing/2014/main" id="{67ADFF0E-4C16-4E4B-86F4-B9168B6E62AE}"/>
+                <a16:creationId xmlns:a16="http://schemas.microsoft.com/office/drawing/2014/main" id="{0FC7F314-D9B1-4628-A52C-A1AC13541824}"/>
               </a:ext>
             </a:extLst>
           </p:cNvPr>
@@ -3372,7 +3372,7 @@
           <p:nvPr/>
         </p:nvPicPr>
         <p:blipFill>
-          <a:blip xmlns:r="http://schemas.openxmlformats.org/officeDocument/2006/relationships" xmlns:a="http://schemas.openxmlformats.org/drawingml/2006/main" r:embed="R70e52a5fc3f64320"/>
+          <a:blip xmlns:r="http://schemas.openxmlformats.org/officeDocument/2006/relationships" xmlns:a="http://schemas.openxmlformats.org/drawingml/2006/main" r:embed="R4125f3f802ec4f89"/>
           <a:stretch xmlns:a="http://schemas.openxmlformats.org/drawingml/2006/main"/>
         </p:blipFill>
         <p:spPr>
@@ -3392,7 +3392,7 @@
           <p:cNvPr id="7" name="">
             <a:extLst xmlns:a="http://schemas.openxmlformats.org/drawingml/2006/main">
               <a:ext uri="{FF2B5EF4-FFF2-40B4-BE49-F238E27FC236}">
-                <a16:creationId xmlns:a16="http://schemas.microsoft.com/office/drawing/2014/main" id="{D6EAA6F2-2EA9-4E91-8A5A-EBAF5FB30E4F}"/>
+                <a16:creationId xmlns:a16="http://schemas.microsoft.com/office/drawing/2014/main" id="{9A833908-3A4A-49CC-BDAC-7E980487232D}"/>
               </a:ext>
             </a:extLst>
           </p:cNvPr>
@@ -3452,7 +3452,7 @@
     </p:spTree>
     <p:extLst>
       <p:ext uri="{BB962C8B-B14F-4D97-AF65-F5344CB8AC3E}">
-        <p14:creationId xmlns:p14="http://schemas.microsoft.com/office/powerpoint/2010/main" val="462709733"/>
+        <p14:creationId xmlns:p14="http://schemas.microsoft.com/office/powerpoint/2010/main" val="421895276"/>
       </p:ext>
     </p:extLst>
   </p:cSld>
@@ -3483,7 +3483,7 @@
           <p:cNvPr id="8" name="">
             <a:extLst xmlns:a="http://schemas.openxmlformats.org/drawingml/2006/main">
               <a:ext uri="{FF2B5EF4-FFF2-40B4-BE49-F238E27FC236}">
-                <a16:creationId xmlns:a16="http://schemas.microsoft.com/office/drawing/2014/main" id="{FA6299A1-C9DB-4707-90D6-CE78008874F8}"/>
+                <a16:creationId xmlns:a16="http://schemas.microsoft.com/office/drawing/2014/main" id="{E6868196-09BE-44A4-B653-5045F6E87D4C}"/>
               </a:ext>
             </a:extLst>
           </p:cNvPr>
@@ -3545,7 +3545,7 @@
           <p:cNvPr id="2" name="">
             <a:extLst xmlns:a="http://schemas.openxmlformats.org/drawingml/2006/main">
               <a:ext uri="{FF2B5EF4-FFF2-40B4-BE49-F238E27FC236}">
-                <a16:creationId xmlns:a16="http://schemas.microsoft.com/office/drawing/2014/main" id="{1A115D93-0604-4E24-ABB2-822906622FB3}"/>
+                <a16:creationId xmlns:a16="http://schemas.microsoft.com/office/drawing/2014/main" id="{2D54E660-6810-4D12-BCCF-2485F62A053C}"/>
               </a:ext>
             </a:extLst>
           </p:cNvPr>
@@ -3576,7 +3576,7 @@
           <p:cNvPr id="3" name="">
             <a:extLst xmlns:a="http://schemas.openxmlformats.org/drawingml/2006/main">
               <a:ext uri="{FF2B5EF4-FFF2-40B4-BE49-F238E27FC236}">
-                <a16:creationId xmlns:a16="http://schemas.microsoft.com/office/drawing/2014/main" id="{F44B1D67-CAF4-4054-BA75-445C60300357}"/>
+                <a16:creationId xmlns:a16="http://schemas.microsoft.com/office/drawing/2014/main" id="{D441F845-A4B7-4399-B026-93928E8438E3}"/>
               </a:ext>
             </a:extLst>
           </p:cNvPr>
@@ -3638,7 +3638,7 @@
           <p:cNvPr id="4" name="">
             <a:extLst xmlns:a="http://schemas.openxmlformats.org/drawingml/2006/main">
               <a:ext uri="{FF2B5EF4-FFF2-40B4-BE49-F238E27FC236}">
-                <a16:creationId xmlns:a16="http://schemas.microsoft.com/office/drawing/2014/main" id="{85205F67-BEE7-4CC9-9802-39BCBC6DECF6}"/>
+                <a16:creationId xmlns:a16="http://schemas.microsoft.com/office/drawing/2014/main" id="{39EEA965-4C74-4678-8DCC-77D63393497C}"/>
               </a:ext>
             </a:extLst>
           </p:cNvPr>
@@ -3793,7 +3793,7 @@
           <p:cNvPr id="5" name="">
             <a:extLst xmlns:a="http://schemas.openxmlformats.org/drawingml/2006/main">
               <a:ext uri="{FF2B5EF4-FFF2-40B4-BE49-F238E27FC236}">
-                <a16:creationId xmlns:a16="http://schemas.microsoft.com/office/drawing/2014/main" id="{0521C728-7137-47ED-A99B-58FB7298F556}"/>
+                <a16:creationId xmlns:a16="http://schemas.microsoft.com/office/drawing/2014/main" id="{09E6EDD7-CDE5-40FF-9F50-7AD52FCE1A16}"/>
               </a:ext>
             </a:extLst>
           </p:cNvPr>
@@ -3859,7 +3859,7 @@
           <p:nvPr/>
         </p:nvPicPr>
         <p:blipFill>
-          <a:blip xmlns:r="http://schemas.openxmlformats.org/officeDocument/2006/relationships" xmlns:a="http://schemas.openxmlformats.org/drawingml/2006/main" r:embed="R121540fff97a4b7a"/>
+          <a:blip xmlns:r="http://schemas.openxmlformats.org/officeDocument/2006/relationships" xmlns:a="http://schemas.openxmlformats.org/drawingml/2006/main" r:embed="R852469964774488c"/>
           <a:stretch xmlns:a="http://schemas.openxmlformats.org/drawingml/2006/main"/>
         </p:blipFill>
         <p:spPr>
@@ -3879,7 +3879,7 @@
           <p:cNvPr id="7" name="">
             <a:extLst xmlns:a="http://schemas.openxmlformats.org/drawingml/2006/main">
               <a:ext uri="{FF2B5EF4-FFF2-40B4-BE49-F238E27FC236}">
-                <a16:creationId xmlns:a16="http://schemas.microsoft.com/office/drawing/2014/main" id="{7A655D44-F7A0-48D9-8E23-9EEEF9C2FFB3}"/>
+                <a16:creationId xmlns:a16="http://schemas.microsoft.com/office/drawing/2014/main" id="{1AAA3DCF-FD60-49BB-B0D7-B829578DB7FA}"/>
               </a:ext>
             </a:extLst>
           </p:cNvPr>
@@ -3939,7 +3939,7 @@
     </p:spTree>
     <p:extLst>
       <p:ext uri="{BB962C8B-B14F-4D97-AF65-F5344CB8AC3E}">
-        <p14:creationId xmlns:p14="http://schemas.microsoft.com/office/powerpoint/2010/main" val="1105492016"/>
+        <p14:creationId xmlns:p14="http://schemas.microsoft.com/office/powerpoint/2010/main" val="461312779"/>
       </p:ext>
     </p:extLst>
   </p:cSld>
@@ -3970,7 +3970,7 @@
           <p:cNvPr id="6" name="">
             <a:extLst xmlns:a="http://schemas.openxmlformats.org/drawingml/2006/main">
               <a:ext uri="{FF2B5EF4-FFF2-40B4-BE49-F238E27FC236}">
-                <a16:creationId xmlns:a16="http://schemas.microsoft.com/office/drawing/2014/main" id="{DC082A13-DEAF-4F57-BD1A-3ED5A7D112C8}"/>
+                <a16:creationId xmlns:a16="http://schemas.microsoft.com/office/drawing/2014/main" id="{7242BD71-CD2D-44DF-8ECA-E8DD943B8468}"/>
               </a:ext>
             </a:extLst>
           </p:cNvPr>
@@ -4032,7 +4032,7 @@
           <p:cNvPr id="2" name="">
             <a:extLst xmlns:a="http://schemas.openxmlformats.org/drawingml/2006/main">
               <a:ext uri="{FF2B5EF4-FFF2-40B4-BE49-F238E27FC236}">
-                <a16:creationId xmlns:a16="http://schemas.microsoft.com/office/drawing/2014/main" id="{7F43C18F-B3E9-446E-AED8-66832A10A022}"/>
+                <a16:creationId xmlns:a16="http://schemas.microsoft.com/office/drawing/2014/main" id="{3A711467-A771-435D-AF3C-3FF1961459B7}"/>
               </a:ext>
             </a:extLst>
           </p:cNvPr>
@@ -4063,7 +4063,7 @@
           <p:cNvPr id="3" name="">
             <a:extLst xmlns:a="http://schemas.openxmlformats.org/drawingml/2006/main">
               <a:ext uri="{FF2B5EF4-FFF2-40B4-BE49-F238E27FC236}">
-                <a16:creationId xmlns:a16="http://schemas.microsoft.com/office/drawing/2014/main" id="{D84EAA37-65A7-4AF6-95C1-10DE2E95F2E3}"/>
+                <a16:creationId xmlns:a16="http://schemas.microsoft.com/office/drawing/2014/main" id="{012D6577-2725-4608-91AA-31E38592FF9F}"/>
               </a:ext>
             </a:extLst>
           </p:cNvPr>
@@ -4639,7 +4639,7 @@
           <p:cNvPr id="5" name="">
             <a:extLst xmlns:a="http://schemas.openxmlformats.org/drawingml/2006/main">
               <a:ext uri="{FF2B5EF4-FFF2-40B4-BE49-F238E27FC236}">
-                <a16:creationId xmlns:a16="http://schemas.microsoft.com/office/drawing/2014/main" id="{3468F790-04D3-47E8-97EF-74CEC29E92EE}"/>
+                <a16:creationId xmlns:a16="http://schemas.microsoft.com/office/drawing/2014/main" id="{101990E0-53DD-4958-9B26-AA3CD90BCE30}"/>
               </a:ext>
             </a:extLst>
           </p:cNvPr>
@@ -4699,7 +4699,7 @@
     </p:spTree>
     <p:extLst>
       <p:ext uri="{BB962C8B-B14F-4D97-AF65-F5344CB8AC3E}">
-        <p14:creationId xmlns:p14="http://schemas.microsoft.com/office/powerpoint/2010/main" val="47265969"/>
+        <p14:creationId xmlns:p14="http://schemas.microsoft.com/office/powerpoint/2010/main" val="329530659"/>
       </p:ext>
     </p:extLst>
   </p:cSld>
@@ -4730,7 +4730,7 @@
           <p:cNvPr id="7" name="">
             <a:extLst xmlns:a="http://schemas.openxmlformats.org/drawingml/2006/main">
               <a:ext uri="{FF2B5EF4-FFF2-40B4-BE49-F238E27FC236}">
-                <a16:creationId xmlns:a16="http://schemas.microsoft.com/office/drawing/2014/main" id="{63C811AC-BDEC-4F2A-BFDF-6735FA09AFD8}"/>
+                <a16:creationId xmlns:a16="http://schemas.microsoft.com/office/drawing/2014/main" id="{A254B650-89EA-48AA-B016-17F31F3D2849}"/>
               </a:ext>
             </a:extLst>
           </p:cNvPr>
@@ -4792,7 +4792,7 @@
           <p:cNvPr id="2" name="">
             <a:extLst xmlns:a="http://schemas.openxmlformats.org/drawingml/2006/main">
               <a:ext uri="{FF2B5EF4-FFF2-40B4-BE49-F238E27FC236}">
-                <a16:creationId xmlns:a16="http://schemas.microsoft.com/office/drawing/2014/main" id="{C9B4218B-F067-4854-8652-1E494E8FF077}"/>
+                <a16:creationId xmlns:a16="http://schemas.microsoft.com/office/drawing/2014/main" id="{9BD07CE0-B37E-4D94-8CDD-634BA2706CD3}"/>
               </a:ext>
             </a:extLst>
           </p:cNvPr>
@@ -4823,7 +4823,7 @@
           <p:cNvPr id="3" name="">
             <a:extLst xmlns:a="http://schemas.openxmlformats.org/drawingml/2006/main">
               <a:ext uri="{FF2B5EF4-FFF2-40B4-BE49-F238E27FC236}">
-                <a16:creationId xmlns:a16="http://schemas.microsoft.com/office/drawing/2014/main" id="{8692BFE6-8C7E-44D5-9FA9-5D80213A24AB}"/>
+                <a16:creationId xmlns:a16="http://schemas.microsoft.com/office/drawing/2014/main" id="{BCBABAF1-3785-4C69-9457-8BDDD337C701}"/>
               </a:ext>
             </a:extLst>
           </p:cNvPr>
@@ -4885,7 +4885,7 @@
           <p:cNvPr id="4" name="">
             <a:extLst xmlns:a="http://schemas.openxmlformats.org/drawingml/2006/main">
               <a:ext uri="{FF2B5EF4-FFF2-40B4-BE49-F238E27FC236}">
-                <a16:creationId xmlns:a16="http://schemas.microsoft.com/office/drawing/2014/main" id="{EF30C0C4-1D59-4BCC-B37F-B32D01CADA50}"/>
+                <a16:creationId xmlns:a16="http://schemas.microsoft.com/office/drawing/2014/main" id="{738661FF-DA02-4582-8267-4CDCAE0FBD92}"/>
               </a:ext>
             </a:extLst>
           </p:cNvPr>
@@ -5044,7 +5044,7 @@
           <p:nvPr/>
         </p:nvPicPr>
         <p:blipFill>
-          <a:blip xmlns:r="http://schemas.openxmlformats.org/officeDocument/2006/relationships" xmlns:a="http://schemas.openxmlformats.org/drawingml/2006/main" r:embed="Rca37050765d040f2"/>
+          <a:blip xmlns:r="http://schemas.openxmlformats.org/officeDocument/2006/relationships" xmlns:a="http://schemas.openxmlformats.org/drawingml/2006/main" r:embed="Rd3d2b8ced54042a6"/>
           <a:stretch xmlns:a="http://schemas.openxmlformats.org/drawingml/2006/main"/>
         </p:blipFill>
         <p:spPr>
@@ -5064,7 +5064,7 @@
           <p:cNvPr id="6" name="">
             <a:extLst xmlns:a="http://schemas.openxmlformats.org/drawingml/2006/main">
               <a:ext uri="{FF2B5EF4-FFF2-40B4-BE49-F238E27FC236}">
-                <a16:creationId xmlns:a16="http://schemas.microsoft.com/office/drawing/2014/main" id="{B61AF392-A176-4B2D-BD7E-D92F1FE2C64C}"/>
+                <a16:creationId xmlns:a16="http://schemas.microsoft.com/office/drawing/2014/main" id="{31A6DCD9-2AFA-49B0-8B95-2ED5C77CC013}"/>
               </a:ext>
             </a:extLst>
           </p:cNvPr>
@@ -5124,7 +5124,7 @@
     </p:spTree>
     <p:extLst>
       <p:ext uri="{BB962C8B-B14F-4D97-AF65-F5344CB8AC3E}">
-        <p14:creationId xmlns:p14="http://schemas.microsoft.com/office/powerpoint/2010/main" val="1476056872"/>
+        <p14:creationId xmlns:p14="http://schemas.microsoft.com/office/powerpoint/2010/main" val="258133775"/>
       </p:ext>
     </p:extLst>
   </p:cSld>
@@ -5155,7 +5155,7 @@
           <p:cNvPr id="6" name="">
             <a:extLst xmlns:a="http://schemas.openxmlformats.org/drawingml/2006/main">
               <a:ext uri="{FF2B5EF4-FFF2-40B4-BE49-F238E27FC236}">
-                <a16:creationId xmlns:a16="http://schemas.microsoft.com/office/drawing/2014/main" id="{6A69F0A4-B40F-4510-86EE-AF2C1E9E1B37}"/>
+                <a16:creationId xmlns:a16="http://schemas.microsoft.com/office/drawing/2014/main" id="{A9B1D5AF-0F30-4C34-A511-E24B5EC36D89}"/>
               </a:ext>
             </a:extLst>
           </p:cNvPr>
@@ -5217,7 +5217,7 @@
           <p:cNvPr id="2" name="">
             <a:extLst xmlns:a="http://schemas.openxmlformats.org/drawingml/2006/main">
               <a:ext uri="{FF2B5EF4-FFF2-40B4-BE49-F238E27FC236}">
-                <a16:creationId xmlns:a16="http://schemas.microsoft.com/office/drawing/2014/main" id="{2211D3A7-AB30-4AAF-9891-93DB41C76DCD}"/>
+                <a16:creationId xmlns:a16="http://schemas.microsoft.com/office/drawing/2014/main" id="{65B4775A-537B-411A-B1ED-1FC60314B6CF}"/>
               </a:ext>
             </a:extLst>
           </p:cNvPr>
@@ -5248,7 +5248,7 @@
           <p:cNvPr id="3" name="">
             <a:extLst xmlns:a="http://schemas.openxmlformats.org/drawingml/2006/main">
               <a:ext uri="{FF2B5EF4-FFF2-40B4-BE49-F238E27FC236}">
-                <a16:creationId xmlns:a16="http://schemas.microsoft.com/office/drawing/2014/main" id="{78A0A074-1454-4B5C-986F-837D75EC8303}"/>
+                <a16:creationId xmlns:a16="http://schemas.microsoft.com/office/drawing/2014/main" id="{69313C98-85CF-4664-B024-CCA94D4487E3}"/>
               </a:ext>
             </a:extLst>
           </p:cNvPr>
@@ -5310,7 +5310,7 @@
           <p:cNvPr id="4" name="">
             <a:extLst xmlns:a="http://schemas.openxmlformats.org/drawingml/2006/main">
               <a:ext uri="{FF2B5EF4-FFF2-40B4-BE49-F238E27FC236}">
-                <a16:creationId xmlns:a16="http://schemas.microsoft.com/office/drawing/2014/main" id="{E9851038-9705-4500-A9E3-8E2FC248AF42}"/>
+                <a16:creationId xmlns:a16="http://schemas.microsoft.com/office/drawing/2014/main" id="{FD326BF1-25EC-4AD7-9D83-653F52A56A28}"/>
               </a:ext>
             </a:extLst>
           </p:cNvPr>
@@ -5465,7 +5465,7 @@
           <p:cNvPr id="5" name="">
             <a:extLst xmlns:a="http://schemas.openxmlformats.org/drawingml/2006/main">
               <a:ext uri="{FF2B5EF4-FFF2-40B4-BE49-F238E27FC236}">
-                <a16:creationId xmlns:a16="http://schemas.microsoft.com/office/drawing/2014/main" id="{9A34EFFF-5E23-46EB-923C-C9FBFB4796FD}"/>
+                <a16:creationId xmlns:a16="http://schemas.microsoft.com/office/drawing/2014/main" id="{F1081771-C1C1-4567-A566-E8420B1E2D7A}"/>
               </a:ext>
             </a:extLst>
           </p:cNvPr>
@@ -5525,7 +5525,7 @@
     </p:spTree>
     <p:extLst>
       <p:ext uri="{BB962C8B-B14F-4D97-AF65-F5344CB8AC3E}">
-        <p14:creationId xmlns:p14="http://schemas.microsoft.com/office/powerpoint/2010/main" val="213590451"/>
+        <p14:creationId xmlns:p14="http://schemas.microsoft.com/office/powerpoint/2010/main" val="1601970310"/>
       </p:ext>
     </p:extLst>
   </p:cSld>
@@ -5556,7 +5556,7 @@
           <p:cNvPr id="6" name="">
             <a:extLst xmlns:a="http://schemas.openxmlformats.org/drawingml/2006/main">
               <a:ext uri="{FF2B5EF4-FFF2-40B4-BE49-F238E27FC236}">
-                <a16:creationId xmlns:a16="http://schemas.microsoft.com/office/drawing/2014/main" id="{907D0C87-1F7C-480E-9D36-B15802C74975}"/>
+                <a16:creationId xmlns:a16="http://schemas.microsoft.com/office/drawing/2014/main" id="{9E162D79-0E0A-4ACA-A474-D50DD7CF97B2}"/>
               </a:ext>
             </a:extLst>
           </p:cNvPr>
@@ -5618,7 +5618,7 @@
           <p:cNvPr id="2" name="">
             <a:extLst xmlns:a="http://schemas.openxmlformats.org/drawingml/2006/main">
               <a:ext uri="{FF2B5EF4-FFF2-40B4-BE49-F238E27FC236}">
-                <a16:creationId xmlns:a16="http://schemas.microsoft.com/office/drawing/2014/main" id="{BDE1A6DC-1375-4C5D-B710-F1D8D035617F}"/>
+                <a16:creationId xmlns:a16="http://schemas.microsoft.com/office/drawing/2014/main" id="{DEF25164-400B-434D-B9CB-99FC2508F76C}"/>
               </a:ext>
             </a:extLst>
           </p:cNvPr>
@@ -5649,7 +5649,7 @@
           <p:cNvPr id="3" name="">
             <a:extLst xmlns:a="http://schemas.openxmlformats.org/drawingml/2006/main">
               <a:ext uri="{FF2B5EF4-FFF2-40B4-BE49-F238E27FC236}">
-                <a16:creationId xmlns:a16="http://schemas.microsoft.com/office/drawing/2014/main" id="{E12D1056-CAB8-483F-8D2A-C276E9CC07E5}"/>
+                <a16:creationId xmlns:a16="http://schemas.microsoft.com/office/drawing/2014/main" id="{92C46714-8112-484B-93C4-E4CB5954BE99}"/>
               </a:ext>
             </a:extLst>
           </p:cNvPr>
@@ -5933,7 +5933,7 @@
           <p:cNvPr id="5" name="">
             <a:extLst xmlns:a="http://schemas.openxmlformats.org/drawingml/2006/main">
               <a:ext uri="{FF2B5EF4-FFF2-40B4-BE49-F238E27FC236}">
-                <a16:creationId xmlns:a16="http://schemas.microsoft.com/office/drawing/2014/main" id="{9AA8A097-14BD-42BE-808D-941C9C4E948F}"/>
+                <a16:creationId xmlns:a16="http://schemas.microsoft.com/office/drawing/2014/main" id="{C34CEE85-8550-4E9A-82E9-3ED009A5DF4C}"/>
               </a:ext>
             </a:extLst>
           </p:cNvPr>
@@ -6086,7 +6086,7 @@
     </p:spTree>
     <p:extLst>
       <p:ext uri="{BB962C8B-B14F-4D97-AF65-F5344CB8AC3E}">
-        <p14:creationId xmlns:p14="http://schemas.microsoft.com/office/powerpoint/2010/main" val="1737752778"/>
+        <p14:creationId xmlns:p14="http://schemas.microsoft.com/office/powerpoint/2010/main" val="173645400"/>
       </p:ext>
     </p:extLst>
   </p:cSld>
@@ -6117,7 +6117,7 @@
           <p:cNvPr id="7" name="">
             <a:extLst xmlns:a="http://schemas.openxmlformats.org/drawingml/2006/main">
               <a:ext uri="{FF2B5EF4-FFF2-40B4-BE49-F238E27FC236}">
-                <a16:creationId xmlns:a16="http://schemas.microsoft.com/office/drawing/2014/main" id="{A1F56AE5-62FD-4C31-8A31-A96910265A71}"/>
+                <a16:creationId xmlns:a16="http://schemas.microsoft.com/office/drawing/2014/main" id="{8C42496A-2BCF-49EF-B5DB-A7F1749F32FB}"/>
               </a:ext>
             </a:extLst>
           </p:cNvPr>
@@ -6179,7 +6179,7 @@
           <p:cNvPr id="2" name="">
             <a:extLst xmlns:a="http://schemas.openxmlformats.org/drawingml/2006/main">
               <a:ext uri="{FF2B5EF4-FFF2-40B4-BE49-F238E27FC236}">
-                <a16:creationId xmlns:a16="http://schemas.microsoft.com/office/drawing/2014/main" id="{35DAD63E-569A-4ACB-A4CC-4B289776B8C9}"/>
+                <a16:creationId xmlns:a16="http://schemas.microsoft.com/office/drawing/2014/main" id="{F19BA938-4B91-41FE-8575-FAFC61C275CA}"/>
               </a:ext>
             </a:extLst>
           </p:cNvPr>
@@ -6210,7 +6210,7 @@
           <p:cNvPr id="3" name="">
             <a:extLst xmlns:a="http://schemas.openxmlformats.org/drawingml/2006/main">
               <a:ext uri="{FF2B5EF4-FFF2-40B4-BE49-F238E27FC236}">
-                <a16:creationId xmlns:a16="http://schemas.microsoft.com/office/drawing/2014/main" id="{20A6A2ED-CC1E-453A-8A41-F01245E907CA}"/>
+                <a16:creationId xmlns:a16="http://schemas.microsoft.com/office/drawing/2014/main" id="{1364C7E8-DFC1-41EF-B000-C996E3E54195}"/>
               </a:ext>
             </a:extLst>
           </p:cNvPr>
@@ -6272,7 +6272,7 @@
           <p:cNvPr id="4" name="">
             <a:extLst xmlns:a="http://schemas.openxmlformats.org/drawingml/2006/main">
               <a:ext uri="{FF2B5EF4-FFF2-40B4-BE49-F238E27FC236}">
-                <a16:creationId xmlns:a16="http://schemas.microsoft.com/office/drawing/2014/main" id="{906C8DC4-A0B6-4A4B-9518-B75E4315C085}"/>
+                <a16:creationId xmlns:a16="http://schemas.microsoft.com/office/drawing/2014/main" id="{00AEA55D-A765-4712-851B-05F6D3A65ED9}"/>
               </a:ext>
             </a:extLst>
           </p:cNvPr>
@@ -6334,7 +6334,7 @@
           <p:cNvPr id="5" name="">
             <a:extLst xmlns:a="http://schemas.openxmlformats.org/drawingml/2006/main">
               <a:ext uri="{FF2B5EF4-FFF2-40B4-BE49-F238E27FC236}">
-                <a16:creationId xmlns:a16="http://schemas.microsoft.com/office/drawing/2014/main" id="{34C96E56-C145-49AA-BB27-C15D61CA144F}"/>
+                <a16:creationId xmlns:a16="http://schemas.microsoft.com/office/drawing/2014/main" id="{BAED9692-0567-4AEE-BE73-4EECF5485B2F}"/>
               </a:ext>
             </a:extLst>
           </p:cNvPr>
@@ -6489,7 +6489,7 @@
           <p:cNvPr id="6" name="">
             <a:extLst xmlns:a="http://schemas.openxmlformats.org/drawingml/2006/main">
               <a:ext uri="{FF2B5EF4-FFF2-40B4-BE49-F238E27FC236}">
-                <a16:creationId xmlns:a16="http://schemas.microsoft.com/office/drawing/2014/main" id="{36EF74E3-98E2-40C5-9F60-FFE7801151CB}"/>
+                <a16:creationId xmlns:a16="http://schemas.microsoft.com/office/drawing/2014/main" id="{D45CB97D-91DC-434B-B4F4-C742968E5520}"/>
               </a:ext>
             </a:extLst>
           </p:cNvPr>
@@ -6549,7 +6549,7 @@
     </p:spTree>
     <p:extLst>
       <p:ext uri="{BB962C8B-B14F-4D97-AF65-F5344CB8AC3E}">
-        <p14:creationId xmlns:p14="http://schemas.microsoft.com/office/powerpoint/2010/main" val="180185073"/>
+        <p14:creationId xmlns:p14="http://schemas.microsoft.com/office/powerpoint/2010/main" val="468761688"/>
       </p:ext>
     </p:extLst>
   </p:cSld>
@@ -6580,7 +6580,7 @@
           <p:cNvPr id="5" name="">
             <a:extLst xmlns:a="http://schemas.openxmlformats.org/drawingml/2006/main">
               <a:ext uri="{FF2B5EF4-FFF2-40B4-BE49-F238E27FC236}">
-                <a16:creationId xmlns:a16="http://schemas.microsoft.com/office/drawing/2014/main" id="{79D6F179-DD1F-45A7-8750-14D565D5DBD5}"/>
+                <a16:creationId xmlns:a16="http://schemas.microsoft.com/office/drawing/2014/main" id="{88BC5EA2-91AB-45FB-B86E-BBADF9C82F51}"/>
               </a:ext>
             </a:extLst>
           </p:cNvPr>
@@ -6642,7 +6642,7 @@
           <p:cNvPr id="2" name="">
             <a:extLst xmlns:a="http://schemas.openxmlformats.org/drawingml/2006/main">
               <a:ext uri="{FF2B5EF4-FFF2-40B4-BE49-F238E27FC236}">
-                <a16:creationId xmlns:a16="http://schemas.microsoft.com/office/drawing/2014/main" id="{E1DC68A4-94ED-41A9-98DB-573C33DC7D78}"/>
+                <a16:creationId xmlns:a16="http://schemas.microsoft.com/office/drawing/2014/main" id="{CCD8D9F8-E129-40E4-85B6-BDB83472E803}"/>
               </a:ext>
             </a:extLst>
           </p:cNvPr>
@@ -6673,7 +6673,7 @@
           <p:cNvPr id="3" name="">
             <a:extLst xmlns:a="http://schemas.openxmlformats.org/drawingml/2006/main">
               <a:ext uri="{FF2B5EF4-FFF2-40B4-BE49-F238E27FC236}">
-                <a16:creationId xmlns:a16="http://schemas.microsoft.com/office/drawing/2014/main" id="{EF4A7965-0FED-4EC6-9483-F39B0E39650C}"/>
+                <a16:creationId xmlns:a16="http://schemas.microsoft.com/office/drawing/2014/main" id="{734163F4-DD1C-4719-8A75-418DFBB6D284}"/>
               </a:ext>
             </a:extLst>
           </p:cNvPr>
@@ -6735,7 +6735,7 @@
           <p:cNvPr id="4" name="">
             <a:extLst xmlns:a="http://schemas.openxmlformats.org/drawingml/2006/main">
               <a:ext uri="{FF2B5EF4-FFF2-40B4-BE49-F238E27FC236}">
-                <a16:creationId xmlns:a16="http://schemas.microsoft.com/office/drawing/2014/main" id="{7D818B91-FDE0-4E64-AD05-641C0A1B281F}"/>
+                <a16:creationId xmlns:a16="http://schemas.microsoft.com/office/drawing/2014/main" id="{15B2DC12-87BE-4340-B961-13691B833A32}"/>
               </a:ext>
             </a:extLst>
           </p:cNvPr>
@@ -6918,7 +6918,7 @@
     </p:spTree>
     <p:extLst>
       <p:ext uri="{BB962C8B-B14F-4D97-AF65-F5344CB8AC3E}">
-        <p14:creationId xmlns:p14="http://schemas.microsoft.com/office/powerpoint/2010/main" val="1998354406"/>
+        <p14:creationId xmlns:p14="http://schemas.microsoft.com/office/powerpoint/2010/main" val="909810748"/>
       </p:ext>
     </p:extLst>
   </p:cSld>
@@ -6949,7 +6949,7 @@
           <p:cNvPr id="9" name="">
             <a:extLst xmlns:a="http://schemas.openxmlformats.org/drawingml/2006/main">
               <a:ext uri="{FF2B5EF4-FFF2-40B4-BE49-F238E27FC236}">
-                <a16:creationId xmlns:a16="http://schemas.microsoft.com/office/drawing/2014/main" id="{1F8805F4-7E5E-4B6E-BE24-4FCA31DA5B7A}"/>
+                <a16:creationId xmlns:a16="http://schemas.microsoft.com/office/drawing/2014/main" id="{C6EBF901-684C-44DC-9E1E-9A8FAF46873E}"/>
               </a:ext>
             </a:extLst>
           </p:cNvPr>
@@ -7011,7 +7011,7 @@
           <p:cNvPr id="2" name="">
             <a:extLst xmlns:a="http://schemas.openxmlformats.org/drawingml/2006/main">
               <a:ext uri="{FF2B5EF4-FFF2-40B4-BE49-F238E27FC236}">
-                <a16:creationId xmlns:a16="http://schemas.microsoft.com/office/drawing/2014/main" id="{34C70CC0-8EC4-4378-AE1A-BD28C97E1E51}"/>
+                <a16:creationId xmlns:a16="http://schemas.microsoft.com/office/drawing/2014/main" id="{FBEAEC98-039F-44DC-B353-DC72A571A695}"/>
               </a:ext>
             </a:extLst>
           </p:cNvPr>
@@ -7042,7 +7042,7 @@
           <p:cNvPr id="3" name="">
             <a:extLst xmlns:a="http://schemas.openxmlformats.org/drawingml/2006/main">
               <a:ext uri="{FF2B5EF4-FFF2-40B4-BE49-F238E27FC236}">
-                <a16:creationId xmlns:a16="http://schemas.microsoft.com/office/drawing/2014/main" id="{82770DC3-AE90-46A8-97B8-C09778593FFB}"/>
+                <a16:creationId xmlns:a16="http://schemas.microsoft.com/office/drawing/2014/main" id="{FB149A59-CDD6-42ED-BA73-98E03B9A7C7B}"/>
               </a:ext>
             </a:extLst>
           </p:cNvPr>
@@ -7104,7 +7104,7 @@
           <p:cNvPr id="4" name="">
             <a:extLst xmlns:a="http://schemas.openxmlformats.org/drawingml/2006/main">
               <a:ext uri="{FF2B5EF4-FFF2-40B4-BE49-F238E27FC236}">
-                <a16:creationId xmlns:a16="http://schemas.microsoft.com/office/drawing/2014/main" id="{418D57EE-36FF-4978-ADC9-C5F2AF02F5F7}"/>
+                <a16:creationId xmlns:a16="http://schemas.microsoft.com/office/drawing/2014/main" id="{4A5A4566-93E2-4332-8B3B-13F1F6CC3B06}"/>
               </a:ext>
             </a:extLst>
           </p:cNvPr>
@@ -7166,7 +7166,7 @@
           <p:cNvPr id="5" name="">
             <a:extLst xmlns:a="http://schemas.openxmlformats.org/drawingml/2006/main">
               <a:ext uri="{FF2B5EF4-FFF2-40B4-BE49-F238E27FC236}">
-                <a16:creationId xmlns:a16="http://schemas.microsoft.com/office/drawing/2014/main" id="{004A36EF-30EC-443C-A9FC-4CD1D7D09541}"/>
+                <a16:creationId xmlns:a16="http://schemas.microsoft.com/office/drawing/2014/main" id="{4FA24B16-5422-4272-A9E1-4EC76FD8BC8B}"/>
               </a:ext>
             </a:extLst>
           </p:cNvPr>
@@ -7291,7 +7291,7 @@
           <p:cNvPr id="6" name="">
             <a:extLst xmlns:a="http://schemas.openxmlformats.org/drawingml/2006/main">
               <a:ext uri="{FF2B5EF4-FFF2-40B4-BE49-F238E27FC236}">
-                <a16:creationId xmlns:a16="http://schemas.microsoft.com/office/drawing/2014/main" id="{439C85B0-E704-41E7-B8EA-C3F8EA1F9D47}"/>
+                <a16:creationId xmlns:a16="http://schemas.microsoft.com/office/drawing/2014/main" id="{5770E50B-BCE7-47F1-A9B5-2ADA52D0148D}"/>
               </a:ext>
             </a:extLst>
           </p:cNvPr>
@@ -7353,7 +7353,7 @@
           <p:cNvPr id="7" name="">
             <a:extLst xmlns:a="http://schemas.openxmlformats.org/drawingml/2006/main">
               <a:ext uri="{FF2B5EF4-FFF2-40B4-BE49-F238E27FC236}">
-                <a16:creationId xmlns:a16="http://schemas.microsoft.com/office/drawing/2014/main" id="{CDC7EAF6-CB76-49F5-AB6C-84727E82A780}"/>
+                <a16:creationId xmlns:a16="http://schemas.microsoft.com/office/drawing/2014/main" id="{85824E17-72CA-4EAD-883A-F3C43E7333F9}"/>
               </a:ext>
             </a:extLst>
           </p:cNvPr>
@@ -7508,7 +7508,7 @@
           <p:cNvPr id="8" name="">
             <a:extLst xmlns:a="http://schemas.openxmlformats.org/drawingml/2006/main">
               <a:ext uri="{FF2B5EF4-FFF2-40B4-BE49-F238E27FC236}">
-                <a16:creationId xmlns:a16="http://schemas.microsoft.com/office/drawing/2014/main" id="{164B8264-72E0-4DFF-B487-9D4D02B57732}"/>
+                <a16:creationId xmlns:a16="http://schemas.microsoft.com/office/drawing/2014/main" id="{3BE52A5D-547C-444D-A2CA-A699C0D60BCC}"/>
               </a:ext>
             </a:extLst>
           </p:cNvPr>
@@ -7568,7 +7568,7 @@
     </p:spTree>
     <p:extLst>
       <p:ext uri="{BB962C8B-B14F-4D97-AF65-F5344CB8AC3E}">
-        <p14:creationId xmlns:p14="http://schemas.microsoft.com/office/powerpoint/2010/main" val="925452948"/>
+        <p14:creationId xmlns:p14="http://schemas.microsoft.com/office/powerpoint/2010/main" val="319651965"/>
       </p:ext>
     </p:extLst>
   </p:cSld>
@@ -7599,7 +7599,7 @@
           <p:cNvPr id="8" name="">
             <a:extLst xmlns:a="http://schemas.openxmlformats.org/drawingml/2006/main">
               <a:ext uri="{FF2B5EF4-FFF2-40B4-BE49-F238E27FC236}">
-                <a16:creationId xmlns:a16="http://schemas.microsoft.com/office/drawing/2014/main" id="{8BAE67BD-59FE-4B9D-919B-DB285D0CEDBB}"/>
+                <a16:creationId xmlns:a16="http://schemas.microsoft.com/office/drawing/2014/main" id="{90F930F6-D2B6-4298-A3C7-92CE22C7BFC4}"/>
               </a:ext>
             </a:extLst>
           </p:cNvPr>
@@ -7661,7 +7661,7 @@
           <p:cNvPr id="2" name="">
             <a:extLst xmlns:a="http://schemas.openxmlformats.org/drawingml/2006/main">
               <a:ext uri="{FF2B5EF4-FFF2-40B4-BE49-F238E27FC236}">
-                <a16:creationId xmlns:a16="http://schemas.microsoft.com/office/drawing/2014/main" id="{88F8E230-2F90-4EDA-A595-AB606A7C38EF}"/>
+                <a16:creationId xmlns:a16="http://schemas.microsoft.com/office/drawing/2014/main" id="{BED2D488-4C0A-448D-BAB9-C70E4FC10D9C}"/>
               </a:ext>
             </a:extLst>
           </p:cNvPr>
@@ -7692,7 +7692,7 @@
           <p:cNvPr id="3" name="">
             <a:extLst xmlns:a="http://schemas.openxmlformats.org/drawingml/2006/main">
               <a:ext uri="{FF2B5EF4-FFF2-40B4-BE49-F238E27FC236}">
-                <a16:creationId xmlns:a16="http://schemas.microsoft.com/office/drawing/2014/main" id="{6FCF990E-8D86-433C-8C1F-014628747822}"/>
+                <a16:creationId xmlns:a16="http://schemas.microsoft.com/office/drawing/2014/main" id="{C590C4D7-B17A-4F39-9948-4B43E8795832}"/>
               </a:ext>
             </a:extLst>
           </p:cNvPr>
@@ -7754,7 +7754,7 @@
           <p:cNvPr id="4" name="">
             <a:extLst xmlns:a="http://schemas.openxmlformats.org/drawingml/2006/main">
               <a:ext uri="{FF2B5EF4-FFF2-40B4-BE49-F238E27FC236}">
-                <a16:creationId xmlns:a16="http://schemas.microsoft.com/office/drawing/2014/main" id="{F812DADE-0D86-4326-824B-7AAA3234F91F}"/>
+                <a16:creationId xmlns:a16="http://schemas.microsoft.com/office/drawing/2014/main" id="{8807E71F-002A-4055-90D2-7181FA734F0A}"/>
               </a:ext>
             </a:extLst>
           </p:cNvPr>
@@ -7816,7 +7816,7 @@
           <p:cNvPr id="5" name="">
             <a:extLst xmlns:a="http://schemas.openxmlformats.org/drawingml/2006/main">
               <a:ext uri="{FF2B5EF4-FFF2-40B4-BE49-F238E27FC236}">
-                <a16:creationId xmlns:a16="http://schemas.microsoft.com/office/drawing/2014/main" id="{5B130321-40B0-45FD-8C0B-B6D0759177DA}"/>
+                <a16:creationId xmlns:a16="http://schemas.microsoft.com/office/drawing/2014/main" id="{D0830A34-6FDC-46B7-BAF3-A8844377B0BB}"/>
               </a:ext>
             </a:extLst>
           </p:cNvPr>
@@ -7971,7 +7971,7 @@
           <p:cNvPr id="6" name="">
             <a:extLst xmlns:a="http://schemas.openxmlformats.org/drawingml/2006/main">
               <a:ext uri="{FF2B5EF4-FFF2-40B4-BE49-F238E27FC236}">
-                <a16:creationId xmlns:a16="http://schemas.microsoft.com/office/drawing/2014/main" id="{8C27F39C-1BAE-4DAA-837C-309CFAB26EF1}"/>
+                <a16:creationId xmlns:a16="http://schemas.microsoft.com/office/drawing/2014/main" id="{D7E41EB4-2D11-44CA-9D1C-0AF0CAC79530}"/>
               </a:ext>
             </a:extLst>
           </p:cNvPr>
@@ -8033,7 +8033,7 @@
           <p:cNvPr id="7" name="">
             <a:extLst xmlns:a="http://schemas.openxmlformats.org/drawingml/2006/main">
               <a:ext uri="{FF2B5EF4-FFF2-40B4-BE49-F238E27FC236}">
-                <a16:creationId xmlns:a16="http://schemas.microsoft.com/office/drawing/2014/main" id="{9C9B9547-D6DE-49BB-BDDB-83173CF2E191}"/>
+                <a16:creationId xmlns:a16="http://schemas.microsoft.com/office/drawing/2014/main" id="{1F403599-A91C-499E-B8F8-1D49C5846E3B}"/>
               </a:ext>
             </a:extLst>
           </p:cNvPr>
@@ -8186,7 +8186,7 @@
     </p:spTree>
     <p:extLst>
       <p:ext uri="{BB962C8B-B14F-4D97-AF65-F5344CB8AC3E}">
-        <p14:creationId xmlns:p14="http://schemas.microsoft.com/office/powerpoint/2010/main" val="825369569"/>
+        <p14:creationId xmlns:p14="http://schemas.microsoft.com/office/powerpoint/2010/main" val="313392751"/>
       </p:ext>
     </p:extLst>
   </p:cSld>
@@ -8217,7 +8217,7 @@
           <p:cNvPr id="7" name="">
             <a:extLst xmlns:a="http://schemas.openxmlformats.org/drawingml/2006/main">
               <a:ext uri="{FF2B5EF4-FFF2-40B4-BE49-F238E27FC236}">
-                <a16:creationId xmlns:a16="http://schemas.microsoft.com/office/drawing/2014/main" id="{1A815E3D-4B17-4D07-8301-F877784685B3}"/>
+                <a16:creationId xmlns:a16="http://schemas.microsoft.com/office/drawing/2014/main" id="{18000965-B002-489A-9173-930AED544A78}"/>
               </a:ext>
             </a:extLst>
           </p:cNvPr>
@@ -8279,7 +8279,7 @@
           <p:cNvPr id="2" name="">
             <a:extLst xmlns:a="http://schemas.openxmlformats.org/drawingml/2006/main">
               <a:ext uri="{FF2B5EF4-FFF2-40B4-BE49-F238E27FC236}">
-                <a16:creationId xmlns:a16="http://schemas.microsoft.com/office/drawing/2014/main" id="{5530D4F0-B7F5-4297-AA92-F4F685EC1CE4}"/>
+                <a16:creationId xmlns:a16="http://schemas.microsoft.com/office/drawing/2014/main" id="{5907D167-2FA4-48CF-8B3B-C56A2E853224}"/>
               </a:ext>
             </a:extLst>
           </p:cNvPr>
@@ -8310,7 +8310,7 @@
           <p:cNvPr id="3" name="">
             <a:extLst xmlns:a="http://schemas.openxmlformats.org/drawingml/2006/main">
               <a:ext uri="{FF2B5EF4-FFF2-40B4-BE49-F238E27FC236}">
-                <a16:creationId xmlns:a16="http://schemas.microsoft.com/office/drawing/2014/main" id="{6DC8522E-F9A1-4392-8A89-49C71748B883}"/>
+                <a16:creationId xmlns:a16="http://schemas.microsoft.com/office/drawing/2014/main" id="{7DE8B580-AA32-4FE4-B01C-7E75614E2336}"/>
               </a:ext>
             </a:extLst>
           </p:cNvPr>
@@ -8372,7 +8372,7 @@
           <p:cNvPr id="4" name="">
             <a:extLst xmlns:a="http://schemas.openxmlformats.org/drawingml/2006/main">
               <a:ext uri="{FF2B5EF4-FFF2-40B4-BE49-F238E27FC236}">
-                <a16:creationId xmlns:a16="http://schemas.microsoft.com/office/drawing/2014/main" id="{436680C9-E12D-46F0-8B7F-BF6503DBEF22}"/>
+                <a16:creationId xmlns:a16="http://schemas.microsoft.com/office/drawing/2014/main" id="{45E0B07D-5A34-40E1-BB26-A0FB575F47D4}"/>
               </a:ext>
             </a:extLst>
           </p:cNvPr>
@@ -8656,7 +8656,7 @@
           <p:cNvPr id="6" name="">
             <a:extLst xmlns:a="http://schemas.openxmlformats.org/drawingml/2006/main">
               <a:ext uri="{FF2B5EF4-FFF2-40B4-BE49-F238E27FC236}">
-                <a16:creationId xmlns:a16="http://schemas.microsoft.com/office/drawing/2014/main" id="{F98FE266-800D-4466-B326-544DAD3CD891}"/>
+                <a16:creationId xmlns:a16="http://schemas.microsoft.com/office/drawing/2014/main" id="{CDDCD438-D2D1-4E96-A7A9-FA129B56B5DF}"/>
               </a:ext>
             </a:extLst>
           </p:cNvPr>
@@ -8716,7 +8716,7 @@
     </p:spTree>
     <p:extLst>
       <p:ext uri="{BB962C8B-B14F-4D97-AF65-F5344CB8AC3E}">
-        <p14:creationId xmlns:p14="http://schemas.microsoft.com/office/powerpoint/2010/main" val="994871674"/>
+        <p14:creationId xmlns:p14="http://schemas.microsoft.com/office/powerpoint/2010/main" val="1638356671"/>
       </p:ext>
     </p:extLst>
   </p:cSld>
@@ -8747,7 +8747,7 @@
           <p:cNvPr id="21" name="">
             <a:extLst xmlns:a="http://schemas.openxmlformats.org/drawingml/2006/main">
               <a:ext uri="{FF2B5EF4-FFF2-40B4-BE49-F238E27FC236}">
-                <a16:creationId xmlns:a16="http://schemas.microsoft.com/office/drawing/2014/main" id="{78B12D9A-4D34-4B02-9562-83DFEB8386B7}"/>
+                <a16:creationId xmlns:a16="http://schemas.microsoft.com/office/drawing/2014/main" id="{1E544E1B-00C1-4788-B77A-10A3A8315A2B}"/>
               </a:ext>
             </a:extLst>
           </p:cNvPr>
@@ -8809,7 +8809,7 @@
           <p:cNvPr id="2" name="">
             <a:extLst xmlns:a="http://schemas.openxmlformats.org/drawingml/2006/main">
               <a:ext uri="{FF2B5EF4-FFF2-40B4-BE49-F238E27FC236}">
-                <a16:creationId xmlns:a16="http://schemas.microsoft.com/office/drawing/2014/main" id="{69C2103A-9AF5-4BC1-8E54-C0C5789CDBBC}"/>
+                <a16:creationId xmlns:a16="http://schemas.microsoft.com/office/drawing/2014/main" id="{C0729227-A9FE-402B-B2FD-221DD283A496}"/>
               </a:ext>
             </a:extLst>
           </p:cNvPr>
@@ -8840,7 +8840,7 @@
           <p:cNvPr id="3" name="">
             <a:extLst xmlns:a="http://schemas.openxmlformats.org/drawingml/2006/main">
               <a:ext uri="{FF2B5EF4-FFF2-40B4-BE49-F238E27FC236}">
-                <a16:creationId xmlns:a16="http://schemas.microsoft.com/office/drawing/2014/main" id="{8328DA29-0D8B-4968-AFB2-6D429DBEB597}"/>
+                <a16:creationId xmlns:a16="http://schemas.microsoft.com/office/drawing/2014/main" id="{D7E3457A-D818-4206-9E56-7748B973318C}"/>
               </a:ext>
             </a:extLst>
           </p:cNvPr>
@@ -8902,7 +8902,7 @@
           <p:cNvPr id="4" name="">
             <a:extLst xmlns:a="http://schemas.openxmlformats.org/drawingml/2006/main">
               <a:ext uri="{FF2B5EF4-FFF2-40B4-BE49-F238E27FC236}">
-                <a16:creationId xmlns:a16="http://schemas.microsoft.com/office/drawing/2014/main" id="{AA398B4C-3B2E-4E98-BDFE-C0968DAA0E75}"/>
+                <a16:creationId xmlns:a16="http://schemas.microsoft.com/office/drawing/2014/main" id="{E2E0AF06-A405-40D1-A109-EF5E4D42ACF3}"/>
               </a:ext>
             </a:extLst>
           </p:cNvPr>
@@ -8964,7 +8964,7 @@
           <p:cNvPr id="5" name="">
             <a:extLst xmlns:a="http://schemas.openxmlformats.org/drawingml/2006/main">
               <a:ext uri="{FF2B5EF4-FFF2-40B4-BE49-F238E27FC236}">
-                <a16:creationId xmlns:a16="http://schemas.microsoft.com/office/drawing/2014/main" id="{BFBD8C1A-2C44-4199-B1B2-600A3CBA70F0}"/>
+                <a16:creationId xmlns:a16="http://schemas.microsoft.com/office/drawing/2014/main" id="{1F9BD2A3-C2CC-4D01-A541-E05353BADCB1}"/>
               </a:ext>
             </a:extLst>
           </p:cNvPr>
@@ -9026,7 +9026,7 @@
           <p:cNvPr id="6" name="">
             <a:extLst xmlns:a="http://schemas.openxmlformats.org/drawingml/2006/main">
               <a:ext uri="{FF2B5EF4-FFF2-40B4-BE49-F238E27FC236}">
-                <a16:creationId xmlns:a16="http://schemas.microsoft.com/office/drawing/2014/main" id="{D17E3930-F94B-4422-AF65-6E47A9969511}"/>
+                <a16:creationId xmlns:a16="http://schemas.microsoft.com/office/drawing/2014/main" id="{74316511-FD9B-4D47-BC59-76294E00BEF4}"/>
               </a:ext>
             </a:extLst>
           </p:cNvPr>
@@ -9088,7 +9088,7 @@
           <p:cNvPr id="7" name="">
             <a:extLst xmlns:a="http://schemas.openxmlformats.org/drawingml/2006/main">
               <a:ext uri="{FF2B5EF4-FFF2-40B4-BE49-F238E27FC236}">
-                <a16:creationId xmlns:a16="http://schemas.microsoft.com/office/drawing/2014/main" id="{180D895A-4817-4300-B754-2A29C3120F80}"/>
+                <a16:creationId xmlns:a16="http://schemas.microsoft.com/office/drawing/2014/main" id="{CAFF6611-96E5-4F44-A57F-8FDAE0A93C4B}"/>
               </a:ext>
             </a:extLst>
           </p:cNvPr>
@@ -9119,7 +9119,7 @@
           <p:cNvPr id="8" name="">
             <a:extLst xmlns:a="http://schemas.openxmlformats.org/drawingml/2006/main">
               <a:ext uri="{FF2B5EF4-FFF2-40B4-BE49-F238E27FC236}">
-                <a16:creationId xmlns:a16="http://schemas.microsoft.com/office/drawing/2014/main" id="{5A57E33C-FC4A-4395-8B28-BD0F50DD4F0B}"/>
+                <a16:creationId xmlns:a16="http://schemas.microsoft.com/office/drawing/2014/main" id="{EAEF7417-B7AB-4A76-BAA9-43528E2D8172}"/>
               </a:ext>
             </a:extLst>
           </p:cNvPr>
@@ -9181,7 +9181,7 @@
           <p:cNvPr id="9" name="">
             <a:extLst xmlns:a="http://schemas.openxmlformats.org/drawingml/2006/main">
               <a:ext uri="{FF2B5EF4-FFF2-40B4-BE49-F238E27FC236}">
-                <a16:creationId xmlns:a16="http://schemas.microsoft.com/office/drawing/2014/main" id="{FF842FE7-26DB-47B6-9F5B-46F1C40E7439}"/>
+                <a16:creationId xmlns:a16="http://schemas.microsoft.com/office/drawing/2014/main" id="{8A0359AD-8E1E-47FB-BF81-221119FB5138}"/>
               </a:ext>
             </a:extLst>
           </p:cNvPr>
@@ -9243,7 +9243,7 @@
           <p:cNvPr id="10" name="">
             <a:extLst xmlns:a="http://schemas.openxmlformats.org/drawingml/2006/main">
               <a:ext uri="{FF2B5EF4-FFF2-40B4-BE49-F238E27FC236}">
-                <a16:creationId xmlns:a16="http://schemas.microsoft.com/office/drawing/2014/main" id="{1FE7A2BB-34A7-4BA4-9401-E0395D0A9EF6}"/>
+                <a16:creationId xmlns:a16="http://schemas.microsoft.com/office/drawing/2014/main" id="{57419B00-880C-4459-8EB2-030B2279E519}"/>
               </a:ext>
             </a:extLst>
           </p:cNvPr>
@@ -9305,7 +9305,7 @@
           <p:cNvPr id="11" name="">
             <a:extLst xmlns:a="http://schemas.openxmlformats.org/drawingml/2006/main">
               <a:ext uri="{FF2B5EF4-FFF2-40B4-BE49-F238E27FC236}">
-                <a16:creationId xmlns:a16="http://schemas.microsoft.com/office/drawing/2014/main" id="{9E36EDD3-17AC-4D4E-AF2B-66202A7F6EA2}"/>
+                <a16:creationId xmlns:a16="http://schemas.microsoft.com/office/drawing/2014/main" id="{5357E87C-895E-4005-881C-0F6BF1072DD4}"/>
               </a:ext>
             </a:extLst>
           </p:cNvPr>
@@ -9336,7 +9336,7 @@
           <p:cNvPr id="12" name="">
             <a:extLst xmlns:a="http://schemas.openxmlformats.org/drawingml/2006/main">
               <a:ext uri="{FF2B5EF4-FFF2-40B4-BE49-F238E27FC236}">
-                <a16:creationId xmlns:a16="http://schemas.microsoft.com/office/drawing/2014/main" id="{CC04109C-CD76-4941-9169-0D0A41C9B2B4}"/>
+                <a16:creationId xmlns:a16="http://schemas.microsoft.com/office/drawing/2014/main" id="{FB96945A-D191-437E-92EB-0827EEB3607F}"/>
               </a:ext>
             </a:extLst>
           </p:cNvPr>
@@ -9398,7 +9398,7 @@
           <p:cNvPr id="13" name="">
             <a:extLst xmlns:a="http://schemas.openxmlformats.org/drawingml/2006/main">
               <a:ext uri="{FF2B5EF4-FFF2-40B4-BE49-F238E27FC236}">
-                <a16:creationId xmlns:a16="http://schemas.microsoft.com/office/drawing/2014/main" id="{23C990CC-786A-4D8B-A194-FA4420FE2BBA}"/>
+                <a16:creationId xmlns:a16="http://schemas.microsoft.com/office/drawing/2014/main" id="{00955762-7013-4726-8C94-F2ADFE280CA4}"/>
               </a:ext>
             </a:extLst>
           </p:cNvPr>
@@ -9460,7 +9460,7 @@
           <p:cNvPr id="14" name="">
             <a:extLst xmlns:a="http://schemas.openxmlformats.org/drawingml/2006/main">
               <a:ext uri="{FF2B5EF4-FFF2-40B4-BE49-F238E27FC236}">
-                <a16:creationId xmlns:a16="http://schemas.microsoft.com/office/drawing/2014/main" id="{A228A0DD-DCCA-4699-AF13-A020308881FC}"/>
+                <a16:creationId xmlns:a16="http://schemas.microsoft.com/office/drawing/2014/main" id="{B9F0AF9C-EC3D-4510-B036-30726041D271}"/>
               </a:ext>
             </a:extLst>
           </p:cNvPr>
@@ -9522,7 +9522,7 @@
           <p:cNvPr id="15" name="">
             <a:extLst xmlns:a="http://schemas.openxmlformats.org/drawingml/2006/main">
               <a:ext uri="{FF2B5EF4-FFF2-40B4-BE49-F238E27FC236}">
-                <a16:creationId xmlns:a16="http://schemas.microsoft.com/office/drawing/2014/main" id="{03CE10B6-8FB3-46E4-A660-A8DAA2853E75}"/>
+                <a16:creationId xmlns:a16="http://schemas.microsoft.com/office/drawing/2014/main" id="{5583BC3C-00DC-4985-9487-342C821F0BC7}"/>
               </a:ext>
             </a:extLst>
           </p:cNvPr>
@@ -9553,7 +9553,7 @@
           <p:cNvPr id="16" name="">
             <a:extLst xmlns:a="http://schemas.openxmlformats.org/drawingml/2006/main">
               <a:ext uri="{FF2B5EF4-FFF2-40B4-BE49-F238E27FC236}">
-                <a16:creationId xmlns:a16="http://schemas.microsoft.com/office/drawing/2014/main" id="{1C22BED8-0C6D-4D86-80E2-5418EC3A5CE9}"/>
+                <a16:creationId xmlns:a16="http://schemas.microsoft.com/office/drawing/2014/main" id="{FDB79303-0094-486D-A7F5-3687E20B4C05}"/>
               </a:ext>
             </a:extLst>
           </p:cNvPr>
@@ -9615,7 +9615,7 @@
           <p:cNvPr id="17" name="">
             <a:extLst xmlns:a="http://schemas.openxmlformats.org/drawingml/2006/main">
               <a:ext uri="{FF2B5EF4-FFF2-40B4-BE49-F238E27FC236}">
-                <a16:creationId xmlns:a16="http://schemas.microsoft.com/office/drawing/2014/main" id="{A53C241B-AD80-4ECB-827E-AC5CD5F6E301}"/>
+                <a16:creationId xmlns:a16="http://schemas.microsoft.com/office/drawing/2014/main" id="{5F16F019-1083-4F24-82C7-995D199CA064}"/>
               </a:ext>
             </a:extLst>
           </p:cNvPr>
@@ -9677,7 +9677,7 @@
           <p:cNvPr id="18" name="">
             <a:extLst xmlns:a="http://schemas.openxmlformats.org/drawingml/2006/main">
               <a:ext uri="{FF2B5EF4-FFF2-40B4-BE49-F238E27FC236}">
-                <a16:creationId xmlns:a16="http://schemas.microsoft.com/office/drawing/2014/main" id="{C12652CD-448B-4587-9D0F-00A02EF84945}"/>
+                <a16:creationId xmlns:a16="http://schemas.microsoft.com/office/drawing/2014/main" id="{055FDED4-C77A-4463-934F-288846CFA737}"/>
               </a:ext>
             </a:extLst>
           </p:cNvPr>
@@ -9739,7 +9739,7 @@
           <p:cNvPr id="19" name="">
             <a:extLst xmlns:a="http://schemas.openxmlformats.org/drawingml/2006/main">
               <a:ext uri="{FF2B5EF4-FFF2-40B4-BE49-F238E27FC236}">
-                <a16:creationId xmlns:a16="http://schemas.microsoft.com/office/drawing/2014/main" id="{F6FF3512-771D-49ED-B8D0-34B4ECC60E91}"/>
+                <a16:creationId xmlns:a16="http://schemas.microsoft.com/office/drawing/2014/main" id="{B3C500DE-69E9-46C3-994E-B7D7A1DEA274}"/>
               </a:ext>
             </a:extLst>
           </p:cNvPr>
@@ -9801,7 +9801,7 @@
           <p:cNvPr id="20" name="">
             <a:extLst xmlns:a="http://schemas.openxmlformats.org/drawingml/2006/main">
               <a:ext uri="{FF2B5EF4-FFF2-40B4-BE49-F238E27FC236}">
-                <a16:creationId xmlns:a16="http://schemas.microsoft.com/office/drawing/2014/main" id="{B9EEE6CD-D3B9-46CB-82B8-2C6E95A40D6B}"/>
+                <a16:creationId xmlns:a16="http://schemas.microsoft.com/office/drawing/2014/main" id="{BABDD20C-C477-458E-BCBD-53094CC45181}"/>
               </a:ext>
             </a:extLst>
           </p:cNvPr>
@@ -9864,7 +9864,7 @@
     </p:spTree>
     <p:extLst>
       <p:ext uri="{BB962C8B-B14F-4D97-AF65-F5344CB8AC3E}">
-        <p14:creationId xmlns:p14="http://schemas.microsoft.com/office/powerpoint/2010/main" val="678799683"/>
+        <p14:creationId xmlns:p14="http://schemas.microsoft.com/office/powerpoint/2010/main" val="504393689"/>
       </p:ext>
     </p:extLst>
   </p:cSld>
@@ -9895,7 +9895,7 @@
           <p:cNvPr id="9" name="">
             <a:extLst xmlns:a="http://schemas.openxmlformats.org/drawingml/2006/main">
               <a:ext uri="{FF2B5EF4-FFF2-40B4-BE49-F238E27FC236}">
-                <a16:creationId xmlns:a16="http://schemas.microsoft.com/office/drawing/2014/main" id="{8AC4C63F-938E-4202-997E-25D5DAF7AD72}"/>
+                <a16:creationId xmlns:a16="http://schemas.microsoft.com/office/drawing/2014/main" id="{E51E02AC-3207-495E-9F7F-B878044619DE}"/>
               </a:ext>
             </a:extLst>
           </p:cNvPr>
@@ -9957,7 +9957,7 @@
           <p:cNvPr id="2" name="">
             <a:extLst xmlns:a="http://schemas.openxmlformats.org/drawingml/2006/main">
               <a:ext uri="{FF2B5EF4-FFF2-40B4-BE49-F238E27FC236}">
-                <a16:creationId xmlns:a16="http://schemas.microsoft.com/office/drawing/2014/main" id="{1FED3D47-EF29-4DA5-91C4-5F1241BFA077}"/>
+                <a16:creationId xmlns:a16="http://schemas.microsoft.com/office/drawing/2014/main" id="{F8B01338-C718-4AAA-8239-6A1AD428AD32}"/>
               </a:ext>
             </a:extLst>
           </p:cNvPr>
@@ -9988,7 +9988,7 @@
           <p:cNvPr id="3" name="">
             <a:extLst xmlns:a="http://schemas.openxmlformats.org/drawingml/2006/main">
               <a:ext uri="{FF2B5EF4-FFF2-40B4-BE49-F238E27FC236}">
-                <a16:creationId xmlns:a16="http://schemas.microsoft.com/office/drawing/2014/main" id="{5ACDBA9D-0333-4A1B-8C0E-53C62FE7C778}"/>
+                <a16:creationId xmlns:a16="http://schemas.microsoft.com/office/drawing/2014/main" id="{3031231C-F457-4529-AF62-A57AFB98D82E}"/>
               </a:ext>
             </a:extLst>
           </p:cNvPr>
@@ -10050,7 +10050,7 @@
           <p:cNvPr id="4" name="">
             <a:extLst xmlns:a="http://schemas.openxmlformats.org/drawingml/2006/main">
               <a:ext uri="{FF2B5EF4-FFF2-40B4-BE49-F238E27FC236}">
-                <a16:creationId xmlns:a16="http://schemas.microsoft.com/office/drawing/2014/main" id="{C7F793EE-CA3A-4703-A3C4-2916AE0279F5}"/>
+                <a16:creationId xmlns:a16="http://schemas.microsoft.com/office/drawing/2014/main" id="{C3A4D5DC-892A-491F-AE42-BD9B41BB1B5C}"/>
               </a:ext>
             </a:extLst>
           </p:cNvPr>
@@ -10112,7 +10112,7 @@
           <p:cNvPr id="5" name="">
             <a:extLst xmlns:a="http://schemas.openxmlformats.org/drawingml/2006/main">
               <a:ext uri="{FF2B5EF4-FFF2-40B4-BE49-F238E27FC236}">
-                <a16:creationId xmlns:a16="http://schemas.microsoft.com/office/drawing/2014/main" id="{F85D4A3D-4D10-4086-8D0E-3EB638D8972F}"/>
+                <a16:creationId xmlns:a16="http://schemas.microsoft.com/office/drawing/2014/main" id="{AA61B137-E0F3-431C-B772-E2A58BF74C72}"/>
               </a:ext>
             </a:extLst>
           </p:cNvPr>
@@ -10167,7 +10167,7 @@
                 <a:ea typeface="Microsoft YaHei"/>
                 <a:cs typeface="Microsoft YaHei"/>
               </a:rPr>
-              <a:t>把政策、新闻与函件文本结构化，抽取事件要素与证据链接</a:t>
+              <a:t>把政策、新闻与函件文本结构化，抽取事件要素与来源链接</a:t>
             </a:r>
           </a:p>
           <a:p xmlns:a="http://schemas.openxmlformats.org/drawingml/2006/main">
@@ -10197,7 +10197,7 @@
                 <a:ea typeface="Microsoft YaHei"/>
                 <a:cs typeface="Microsoft YaHei"/>
               </a:rPr>
-              <a:t>将事件自动转成推演参数，如交期变化、在途延误与供应削减</a:t>
+              <a:t>对抽取结果标注状态与置信度，未确认的信息不进入结论</a:t>
             </a:r>
           </a:p>
           <a:p xmlns:a="http://schemas.openxmlformats.org/drawingml/2006/main">
@@ -10227,7 +10227,7 @@
                 <a:ea typeface="Microsoft YaHei"/>
                 <a:cs typeface="Microsoft YaHei"/>
               </a:rPr>
-              <a:t>生成事件摘要、暴露度说明与行动建议草稿</a:t>
+              <a:t>评分、推演与方案比较采用确定性规则，输出可复现、可复核</a:t>
             </a:r>
           </a:p>
         </p:txBody>
@@ -10237,7 +10237,7 @@
           <p:cNvPr id="6" name="">
             <a:extLst xmlns:a="http://schemas.openxmlformats.org/drawingml/2006/main">
               <a:ext uri="{FF2B5EF4-FFF2-40B4-BE49-F238E27FC236}">
-                <a16:creationId xmlns:a16="http://schemas.microsoft.com/office/drawing/2014/main" id="{DBEB77A2-7441-4369-9F28-183460DB0036}"/>
+                <a16:creationId xmlns:a16="http://schemas.microsoft.com/office/drawing/2014/main" id="{B1035A6F-1AD3-4D85-9880-55A9CAB71AE2}"/>
               </a:ext>
             </a:extLst>
           </p:cNvPr>
@@ -10299,7 +10299,7 @@
           <p:cNvPr id="7" name="">
             <a:extLst xmlns:a="http://schemas.openxmlformats.org/drawingml/2006/main">
               <a:ext uri="{FF2B5EF4-FFF2-40B4-BE49-F238E27FC236}">
-                <a16:creationId xmlns:a16="http://schemas.microsoft.com/office/drawing/2014/main" id="{C272C297-9E6A-4E92-ACF3-1FF7FEA20010}"/>
+                <a16:creationId xmlns:a16="http://schemas.microsoft.com/office/drawing/2014/main" id="{C04AD034-9F6D-4ACD-A305-E6B60F7571D0}"/>
               </a:ext>
             </a:extLst>
           </p:cNvPr>
@@ -10424,7 +10424,7 @@
           <p:cNvPr id="8" name="">
             <a:extLst xmlns:a="http://schemas.openxmlformats.org/drawingml/2006/main">
               <a:ext uri="{FF2B5EF4-FFF2-40B4-BE49-F238E27FC236}">
-                <a16:creationId xmlns:a16="http://schemas.microsoft.com/office/drawing/2014/main" id="{70EA436F-EE74-4B4D-BBF0-D93FF504CCD3}"/>
+                <a16:creationId xmlns:a16="http://schemas.microsoft.com/office/drawing/2014/main" id="{9F464975-DCB9-460E-B5D4-C4E74CEC6305}"/>
               </a:ext>
             </a:extLst>
           </p:cNvPr>
@@ -10476,7 +10476,7 @@
                 <a:ea typeface="Microsoft YaHei"/>
                 <a:cs typeface="Microsoft YaHei"/>
               </a:rPr>
-              <a:t>AI 负责把信息变成可复核的判断依据，而不是替企业做最终决定。</a:t>
+              <a:t>AI 把非结构化信息整理成可复核的结构化依据；最终判断由使用者确认。</a:t>
             </a:r>
           </a:p>
         </p:txBody>
@@ -10484,7 +10484,7 @@
     </p:spTree>
     <p:extLst>
       <p:ext uri="{BB962C8B-B14F-4D97-AF65-F5344CB8AC3E}">
-        <p14:creationId xmlns:p14="http://schemas.microsoft.com/office/powerpoint/2010/main" val="634590061"/>
+        <p14:creationId xmlns:p14="http://schemas.microsoft.com/office/powerpoint/2010/main" val="1368878171"/>
       </p:ext>
     </p:extLst>
   </p:cSld>
@@ -10515,7 +10515,7 @@
           <p:cNvPr id="7" name="">
             <a:extLst xmlns:a="http://schemas.openxmlformats.org/drawingml/2006/main">
               <a:ext uri="{FF2B5EF4-FFF2-40B4-BE49-F238E27FC236}">
-                <a16:creationId xmlns:a16="http://schemas.microsoft.com/office/drawing/2014/main" id="{FCB2FF57-18A4-48CD-B882-C178BC31430F}"/>
+                <a16:creationId xmlns:a16="http://schemas.microsoft.com/office/drawing/2014/main" id="{EDDD6C9C-4381-41AE-AA4C-CB8B0C3852FB}"/>
               </a:ext>
             </a:extLst>
           </p:cNvPr>
@@ -10577,7 +10577,7 @@
           <p:cNvPr id="2" name="">
             <a:extLst xmlns:a="http://schemas.openxmlformats.org/drawingml/2006/main">
               <a:ext uri="{FF2B5EF4-FFF2-40B4-BE49-F238E27FC236}">
-                <a16:creationId xmlns:a16="http://schemas.microsoft.com/office/drawing/2014/main" id="{35D5E111-A236-4BC4-AF8A-4DF105B2FB49}"/>
+                <a16:creationId xmlns:a16="http://schemas.microsoft.com/office/drawing/2014/main" id="{171B4EE5-4C4C-4DA4-B91A-C94C605DEEAD}"/>
               </a:ext>
             </a:extLst>
           </p:cNvPr>
@@ -10608,7 +10608,7 @@
           <p:cNvPr id="3" name="">
             <a:extLst xmlns:a="http://schemas.openxmlformats.org/drawingml/2006/main">
               <a:ext uri="{FF2B5EF4-FFF2-40B4-BE49-F238E27FC236}">
-                <a16:creationId xmlns:a16="http://schemas.microsoft.com/office/drawing/2014/main" id="{67F08DC0-3C16-4506-BC10-C3A72BB52D75}"/>
+                <a16:creationId xmlns:a16="http://schemas.microsoft.com/office/drawing/2014/main" id="{FC47450B-4F8F-4225-92F5-CA2B24D8203C}"/>
               </a:ext>
             </a:extLst>
           </p:cNvPr>
@@ -10670,7 +10670,7 @@
           <p:cNvPr id="4" name="">
             <a:extLst xmlns:a="http://schemas.openxmlformats.org/drawingml/2006/main">
               <a:ext uri="{FF2B5EF4-FFF2-40B4-BE49-F238E27FC236}">
-                <a16:creationId xmlns:a16="http://schemas.microsoft.com/office/drawing/2014/main" id="{4A6CFCE7-8C36-4001-A9F4-274305BA199C}"/>
+                <a16:creationId xmlns:a16="http://schemas.microsoft.com/office/drawing/2014/main" id="{BD9C416F-C998-414A-B62C-0A16771D9F1B}"/>
               </a:ext>
             </a:extLst>
           </p:cNvPr>
@@ -10829,7 +10829,7 @@
           <p:nvPr/>
         </p:nvPicPr>
         <p:blipFill>
-          <a:blip xmlns:r="http://schemas.openxmlformats.org/officeDocument/2006/relationships" xmlns:a="http://schemas.openxmlformats.org/drawingml/2006/main" r:embed="R8d33f2ce5f6f48fa"/>
+          <a:blip xmlns:r="http://schemas.openxmlformats.org/officeDocument/2006/relationships" xmlns:a="http://schemas.openxmlformats.org/drawingml/2006/main" r:embed="Rad4621e62d374ce4"/>
           <a:stretch xmlns:a="http://schemas.openxmlformats.org/drawingml/2006/main"/>
         </p:blipFill>
         <p:spPr>
@@ -10849,7 +10849,7 @@
           <p:cNvPr id="6" name="">
             <a:extLst xmlns:a="http://schemas.openxmlformats.org/drawingml/2006/main">
               <a:ext uri="{FF2B5EF4-FFF2-40B4-BE49-F238E27FC236}">
-                <a16:creationId xmlns:a16="http://schemas.microsoft.com/office/drawing/2014/main" id="{3FF8A2BA-6FBC-4209-9E10-B4053D360FB1}"/>
+                <a16:creationId xmlns:a16="http://schemas.microsoft.com/office/drawing/2014/main" id="{9738C129-633F-42A4-B8FE-FB86EB27A757}"/>
               </a:ext>
             </a:extLst>
           </p:cNvPr>
@@ -10909,7 +10909,7 @@
     </p:spTree>
     <p:extLst>
       <p:ext uri="{BB962C8B-B14F-4D97-AF65-F5344CB8AC3E}">
-        <p14:creationId xmlns:p14="http://schemas.microsoft.com/office/powerpoint/2010/main" val="737975884"/>
+        <p14:creationId xmlns:p14="http://schemas.microsoft.com/office/powerpoint/2010/main" val="737192392"/>
       </p:ext>
     </p:extLst>
   </p:cSld>

--- a/docs/地缘风险_产品介绍PPT_20260908.pptx
+++ b/docs/地缘风险_产品介绍PPT_20260908.pptx
@@ -2,28 +2,28 @@
 <file path=ppt/presentation.xml><?xml version="1.0" encoding="utf-8"?>
 <p:presentation xmlns:p="http://schemas.openxmlformats.org/presentationml/2006/main">
   <p:sldMasterIdLst>
-    <p:sldMasterId xmlns:r="http://schemas.openxmlformats.org/officeDocument/2006/relationships" id="2147483648" r:id="R8e8c4a2879294b6d"/>
+    <p:sldMasterId xmlns:r="http://schemas.openxmlformats.org/officeDocument/2006/relationships" id="2147483648" r:id="R8bd0d63b9574474b"/>
   </p:sldMasterIdLst>
   <p:notesMasterIdLst>
-    <p:notesMasterId xmlns:r="http://schemas.openxmlformats.org/officeDocument/2006/relationships" r:id="R41e51f05b47e428e"/>
+    <p:notesMasterId xmlns:r="http://schemas.openxmlformats.org/officeDocument/2006/relationships" r:id="Re0cc3fa01ede4f58"/>
   </p:notesMasterIdLst>
   <p:sldIdLst>
-    <p:sldId xmlns:r="http://schemas.openxmlformats.org/officeDocument/2006/relationships" id="256" r:id="Rfe493e5c331b49ef"/>
-    <p:sldId xmlns:r="http://schemas.openxmlformats.org/officeDocument/2006/relationships" id="257" r:id="R74edf13dd7004182"/>
-    <p:sldId xmlns:r="http://schemas.openxmlformats.org/officeDocument/2006/relationships" id="258" r:id="R229b83dad82d4662"/>
-    <p:sldId xmlns:r="http://schemas.openxmlformats.org/officeDocument/2006/relationships" id="259" r:id="Rb2236ac36c554a8a"/>
-    <p:sldId xmlns:r="http://schemas.openxmlformats.org/officeDocument/2006/relationships" id="260" r:id="R54ca860b47384052"/>
-    <p:sldId xmlns:r="http://schemas.openxmlformats.org/officeDocument/2006/relationships" id="261" r:id="R18458a571b3942f3"/>
-    <p:sldId xmlns:r="http://schemas.openxmlformats.org/officeDocument/2006/relationships" id="262" r:id="Rb67fe6a584b640d1"/>
-    <p:sldId xmlns:r="http://schemas.openxmlformats.org/officeDocument/2006/relationships" id="263" r:id="R671a9b72c486410e"/>
-    <p:sldId xmlns:r="http://schemas.openxmlformats.org/officeDocument/2006/relationships" id="264" r:id="Rcc041793037140d2"/>
-    <p:sldId xmlns:r="http://schemas.openxmlformats.org/officeDocument/2006/relationships" id="265" r:id="R094a830a3a714aba"/>
-    <p:sldId xmlns:r="http://schemas.openxmlformats.org/officeDocument/2006/relationships" id="266" r:id="R786a9a78c3fb4a9a"/>
-    <p:sldId xmlns:r="http://schemas.openxmlformats.org/officeDocument/2006/relationships" id="267" r:id="R33aea50eae3f483f"/>
-    <p:sldId xmlns:r="http://schemas.openxmlformats.org/officeDocument/2006/relationships" id="268" r:id="Rd7f4060703d84808"/>
-    <p:sldId xmlns:r="http://schemas.openxmlformats.org/officeDocument/2006/relationships" id="269" r:id="R0aeddaf934404387"/>
-    <p:sldId xmlns:r="http://schemas.openxmlformats.org/officeDocument/2006/relationships" id="270" r:id="R93b753a38aab430a"/>
-    <p:sldId xmlns:r="http://schemas.openxmlformats.org/officeDocument/2006/relationships" id="271" r:id="Rbf6bccac5b91432d"/>
+    <p:sldId xmlns:r="http://schemas.openxmlformats.org/officeDocument/2006/relationships" id="256" r:id="R642c03bdd3134023"/>
+    <p:sldId xmlns:r="http://schemas.openxmlformats.org/officeDocument/2006/relationships" id="257" r:id="R53316d6b637d44ae"/>
+    <p:sldId xmlns:r="http://schemas.openxmlformats.org/officeDocument/2006/relationships" id="258" r:id="R38482b12c95b4683"/>
+    <p:sldId xmlns:r="http://schemas.openxmlformats.org/officeDocument/2006/relationships" id="259" r:id="R10409c2454074999"/>
+    <p:sldId xmlns:r="http://schemas.openxmlformats.org/officeDocument/2006/relationships" id="260" r:id="R1c2e4dae9d9843d5"/>
+    <p:sldId xmlns:r="http://schemas.openxmlformats.org/officeDocument/2006/relationships" id="261" r:id="Rf068b47d44f9459c"/>
+    <p:sldId xmlns:r="http://schemas.openxmlformats.org/officeDocument/2006/relationships" id="262" r:id="R67c192fb13424fa4"/>
+    <p:sldId xmlns:r="http://schemas.openxmlformats.org/officeDocument/2006/relationships" id="263" r:id="Rba479e465b894b08"/>
+    <p:sldId xmlns:r="http://schemas.openxmlformats.org/officeDocument/2006/relationships" id="264" r:id="R0472304031ea4ead"/>
+    <p:sldId xmlns:r="http://schemas.openxmlformats.org/officeDocument/2006/relationships" id="265" r:id="R25b94b66e26c479b"/>
+    <p:sldId xmlns:r="http://schemas.openxmlformats.org/officeDocument/2006/relationships" id="266" r:id="R68a35033607f49d3"/>
+    <p:sldId xmlns:r="http://schemas.openxmlformats.org/officeDocument/2006/relationships" id="267" r:id="Ra1d26cf2976940f1"/>
+    <p:sldId xmlns:r="http://schemas.openxmlformats.org/officeDocument/2006/relationships" id="268" r:id="R26d922e569af4403"/>
+    <p:sldId xmlns:r="http://schemas.openxmlformats.org/officeDocument/2006/relationships" id="269" r:id="R7efe244431b74ad8"/>
+    <p:sldId xmlns:r="http://schemas.openxmlformats.org/officeDocument/2006/relationships" id="270" r:id="R34f005f1c0a345b5"/>
+    <p:sldId xmlns:r="http://schemas.openxmlformats.org/officeDocument/2006/relationships" id="271" r:id="R702696803ad846a7"/>
   </p:sldIdLst>
   <p:sldSz cx="12192000" cy="6858000"/>
   <p:notesSz cx="6858000" cy="9144000"/>
@@ -692,7 +692,7 @@
           </a:p>
           <a:p xmlns:a="http://schemas.openxmlformats.org/drawingml/2006/main">
             <a:r>
-              <a:t>“第 17 周”来自当前模拟种子数据，测试口径见 docs/test_cases.md。</a:t>
+              <a:t>第 17 周末归零、第 18 周首次缺口来自当前模拟种子数据，测试口径见 docs/test_cases.md。</a:t>
             </a:r>
           </a:p>
         </p:txBody>
@@ -837,7 +837,7 @@
           </a:p>
           <a:p xmlns:a="http://schemas.openxmlformats.org/drawingml/2006/main">
             <a:r>
-              <a:t>三批订单交付期第 8/12/16 周，均早于第 17 周断供点，因此“现有订单不受影响”是符合赛题设定的结论。</a:t>
+              <a:t>三批订单交付期第 8/12/16 周，均早于首次缺口，因此“现有订单不受影响”是符合赛题设定的结论。</a:t>
             </a:r>
           </a:p>
         </p:txBody>
@@ -1650,7 +1650,7 @@
   </p:cSld>
   <p:clrMap bg1="lt1" tx1="dk1" bg2="lt2" tx2="dk2" accent1="accent1" accent2="accent2" accent3="accent3" accent4="accent4" accent5="accent5" accent6="accent6" hlink="hlink" folHlink="folHlink"/>
   <p:sldLayoutIdLst>
-    <p:sldLayoutId xmlns:r="http://schemas.openxmlformats.org/officeDocument/2006/relationships" id="2147483649" r:id="R4617e1207be74012"/>
+    <p:sldLayoutId xmlns:r="http://schemas.openxmlformats.org/officeDocument/2006/relationships" id="2147483649" r:id="Rd2f4044ba12a4388"/>
   </p:sldLayoutIdLst>
   <p:txStyles>
     <p:titleStyle>
@@ -2201,7 +2201,7 @@
           <p:cNvPr id="7" name="">
             <a:extLst xmlns:a="http://schemas.openxmlformats.org/drawingml/2006/main">
               <a:ext uri="{FF2B5EF4-FFF2-40B4-BE49-F238E27FC236}">
-                <a16:creationId xmlns:a16="http://schemas.microsoft.com/office/drawing/2014/main" id="{8D945EAD-D2ED-4C6B-9506-0DD736F1B3A3}"/>
+                <a16:creationId xmlns:a16="http://schemas.microsoft.com/office/drawing/2014/main" id="{83448BB4-B5A4-4A3E-B3D8-0259FF1A08DE}"/>
               </a:ext>
             </a:extLst>
           </p:cNvPr>
@@ -2263,7 +2263,7 @@
           <p:cNvPr id="2" name="">
             <a:extLst xmlns:a="http://schemas.openxmlformats.org/drawingml/2006/main">
               <a:ext uri="{FF2B5EF4-FFF2-40B4-BE49-F238E27FC236}">
-                <a16:creationId xmlns:a16="http://schemas.microsoft.com/office/drawing/2014/main" id="{ACBACDC0-8DC5-4C1B-BD89-5B64B7C94792}"/>
+                <a16:creationId xmlns:a16="http://schemas.microsoft.com/office/drawing/2014/main" id="{D95573F6-16BC-45C0-98DF-53C8D895A7E0}"/>
               </a:ext>
             </a:extLst>
           </p:cNvPr>
@@ -2325,7 +2325,7 @@
           <p:cNvPr id="3" name="">
             <a:extLst xmlns:a="http://schemas.openxmlformats.org/drawingml/2006/main">
               <a:ext uri="{FF2B5EF4-FFF2-40B4-BE49-F238E27FC236}">
-                <a16:creationId xmlns:a16="http://schemas.microsoft.com/office/drawing/2014/main" id="{636CE62F-442F-49C9-97F4-90B06CA352A4}"/>
+                <a16:creationId xmlns:a16="http://schemas.microsoft.com/office/drawing/2014/main" id="{1BEB6583-AFCA-4FBF-96A3-AE70BF03200D}"/>
               </a:ext>
             </a:extLst>
           </p:cNvPr>
@@ -2356,7 +2356,7 @@
           <p:cNvPr id="4" name="">
             <a:extLst xmlns:a="http://schemas.openxmlformats.org/drawingml/2006/main">
               <a:ext uri="{FF2B5EF4-FFF2-40B4-BE49-F238E27FC236}">
-                <a16:creationId xmlns:a16="http://schemas.microsoft.com/office/drawing/2014/main" id="{124FCC9F-9E94-40D7-8A98-69B394144685}"/>
+                <a16:creationId xmlns:a16="http://schemas.microsoft.com/office/drawing/2014/main" id="{8D8A7786-F8EF-4E6E-9176-66383335C6B1}"/>
               </a:ext>
             </a:extLst>
           </p:cNvPr>
@@ -2418,7 +2418,7 @@
           <p:cNvPr id="5" name="">
             <a:extLst xmlns:a="http://schemas.openxmlformats.org/drawingml/2006/main">
               <a:ext uri="{FF2B5EF4-FFF2-40B4-BE49-F238E27FC236}">
-                <a16:creationId xmlns:a16="http://schemas.microsoft.com/office/drawing/2014/main" id="{B8750E25-9127-45BB-AA9E-9821AEA1809B}"/>
+                <a16:creationId xmlns:a16="http://schemas.microsoft.com/office/drawing/2014/main" id="{34880C90-B888-459B-8BE7-104D760F1B0C}"/>
               </a:ext>
             </a:extLst>
           </p:cNvPr>
@@ -2480,7 +2480,7 @@
           <p:cNvPr id="6" name="">
             <a:extLst xmlns:a="http://schemas.openxmlformats.org/drawingml/2006/main">
               <a:ext uri="{FF2B5EF4-FFF2-40B4-BE49-F238E27FC236}">
-                <a16:creationId xmlns:a16="http://schemas.microsoft.com/office/drawing/2014/main" id="{AD4C2E3A-DC83-446C-8891-9AA43ABCEDAD}"/>
+                <a16:creationId xmlns:a16="http://schemas.microsoft.com/office/drawing/2014/main" id="{6DC157FB-76D0-4053-8E01-6376AC084643}"/>
               </a:ext>
             </a:extLst>
           </p:cNvPr>
@@ -2540,7 +2540,7 @@
     </p:spTree>
     <p:extLst>
       <p:ext uri="{BB962C8B-B14F-4D97-AF65-F5344CB8AC3E}">
-        <p14:creationId xmlns:p14="http://schemas.microsoft.com/office/powerpoint/2010/main" val="862836099"/>
+        <p14:creationId xmlns:p14="http://schemas.microsoft.com/office/powerpoint/2010/main" val="299747742"/>
       </p:ext>
     </p:extLst>
   </p:cSld>
@@ -2571,7 +2571,7 @@
           <p:cNvPr id="7" name="">
             <a:extLst xmlns:a="http://schemas.openxmlformats.org/drawingml/2006/main">
               <a:ext uri="{FF2B5EF4-FFF2-40B4-BE49-F238E27FC236}">
-                <a16:creationId xmlns:a16="http://schemas.microsoft.com/office/drawing/2014/main" id="{7669551A-B28C-4302-9161-AD3D6460C8B1}"/>
+                <a16:creationId xmlns:a16="http://schemas.microsoft.com/office/drawing/2014/main" id="{7FB8CCEC-D4A9-4BD4-A60D-F5EA597D5CED}"/>
               </a:ext>
             </a:extLst>
           </p:cNvPr>
@@ -2633,7 +2633,7 @@
           <p:cNvPr id="2" name="">
             <a:extLst xmlns:a="http://schemas.openxmlformats.org/drawingml/2006/main">
               <a:ext uri="{FF2B5EF4-FFF2-40B4-BE49-F238E27FC236}">
-                <a16:creationId xmlns:a16="http://schemas.microsoft.com/office/drawing/2014/main" id="{720A677F-895F-46EB-A102-41DF0A6B69BE}"/>
+                <a16:creationId xmlns:a16="http://schemas.microsoft.com/office/drawing/2014/main" id="{499086FD-573F-45DC-8AFE-694A7F78198D}"/>
               </a:ext>
             </a:extLst>
           </p:cNvPr>
@@ -2664,7 +2664,7 @@
           <p:cNvPr id="3" name="">
             <a:extLst xmlns:a="http://schemas.openxmlformats.org/drawingml/2006/main">
               <a:ext uri="{FF2B5EF4-FFF2-40B4-BE49-F238E27FC236}">
-                <a16:creationId xmlns:a16="http://schemas.microsoft.com/office/drawing/2014/main" id="{8858C12C-EE15-4F5A-B219-080A412E3211}"/>
+                <a16:creationId xmlns:a16="http://schemas.microsoft.com/office/drawing/2014/main" id="{B5136D5A-FAC1-455C-B909-42C3F85FF71F}"/>
               </a:ext>
             </a:extLst>
           </p:cNvPr>
@@ -2726,7 +2726,7 @@
           <p:cNvPr id="4" name="">
             <a:extLst xmlns:a="http://schemas.openxmlformats.org/drawingml/2006/main">
               <a:ext uri="{FF2B5EF4-FFF2-40B4-BE49-F238E27FC236}">
-                <a16:creationId xmlns:a16="http://schemas.microsoft.com/office/drawing/2014/main" id="{5841BB93-A530-40C3-B768-C7DA512950E9}"/>
+                <a16:creationId xmlns:a16="http://schemas.microsoft.com/office/drawing/2014/main" id="{C6B51240-AA19-493B-90C6-F5FE146E1D68}"/>
               </a:ext>
             </a:extLst>
           </p:cNvPr>
@@ -2885,7 +2885,7 @@
           <p:nvPr/>
         </p:nvPicPr>
         <p:blipFill>
-          <a:blip xmlns:r="http://schemas.openxmlformats.org/officeDocument/2006/relationships" xmlns:a="http://schemas.openxmlformats.org/drawingml/2006/main" r:embed="R81455b9ef2d5485e"/>
+          <a:blip xmlns:r="http://schemas.openxmlformats.org/officeDocument/2006/relationships" xmlns:a="http://schemas.openxmlformats.org/drawingml/2006/main" r:embed="Rc64d9b527a1d4bb1"/>
           <a:stretch xmlns:a="http://schemas.openxmlformats.org/drawingml/2006/main"/>
         </p:blipFill>
         <p:spPr>
@@ -2905,7 +2905,7 @@
           <p:cNvPr id="6" name="">
             <a:extLst xmlns:a="http://schemas.openxmlformats.org/drawingml/2006/main">
               <a:ext uri="{FF2B5EF4-FFF2-40B4-BE49-F238E27FC236}">
-                <a16:creationId xmlns:a16="http://schemas.microsoft.com/office/drawing/2014/main" id="{5D8ACEB4-8644-462A-86D0-78AA086E4C53}"/>
+                <a16:creationId xmlns:a16="http://schemas.microsoft.com/office/drawing/2014/main" id="{A09F352D-666D-45B6-B5C3-BE362978F687}"/>
               </a:ext>
             </a:extLst>
           </p:cNvPr>
@@ -2965,7 +2965,7 @@
     </p:spTree>
     <p:extLst>
       <p:ext uri="{BB962C8B-B14F-4D97-AF65-F5344CB8AC3E}">
-        <p14:creationId xmlns:p14="http://schemas.microsoft.com/office/powerpoint/2010/main" val="71328252"/>
+        <p14:creationId xmlns:p14="http://schemas.microsoft.com/office/powerpoint/2010/main" val="1603559507"/>
       </p:ext>
     </p:extLst>
   </p:cSld>
@@ -2996,7 +2996,7 @@
           <p:cNvPr id="8" name="">
             <a:extLst xmlns:a="http://schemas.openxmlformats.org/drawingml/2006/main">
               <a:ext uri="{FF2B5EF4-FFF2-40B4-BE49-F238E27FC236}">
-                <a16:creationId xmlns:a16="http://schemas.microsoft.com/office/drawing/2014/main" id="{938C824D-6A94-4EFB-A9E3-3EDD00E113BC}"/>
+                <a16:creationId xmlns:a16="http://schemas.microsoft.com/office/drawing/2014/main" id="{931AB5D3-0E26-4C70-9BA0-6C90AE1F1C11}"/>
               </a:ext>
             </a:extLst>
           </p:cNvPr>
@@ -3058,7 +3058,7 @@
           <p:cNvPr id="2" name="">
             <a:extLst xmlns:a="http://schemas.openxmlformats.org/drawingml/2006/main">
               <a:ext uri="{FF2B5EF4-FFF2-40B4-BE49-F238E27FC236}">
-                <a16:creationId xmlns:a16="http://schemas.microsoft.com/office/drawing/2014/main" id="{B8524A08-D94F-4016-82B2-51495CF8FDAD}"/>
+                <a16:creationId xmlns:a16="http://schemas.microsoft.com/office/drawing/2014/main" id="{E4F32EC1-C40C-41CB-AF9C-395ACF3C595A}"/>
               </a:ext>
             </a:extLst>
           </p:cNvPr>
@@ -3089,7 +3089,7 @@
           <p:cNvPr id="3" name="">
             <a:extLst xmlns:a="http://schemas.openxmlformats.org/drawingml/2006/main">
               <a:ext uri="{FF2B5EF4-FFF2-40B4-BE49-F238E27FC236}">
-                <a16:creationId xmlns:a16="http://schemas.microsoft.com/office/drawing/2014/main" id="{F9AF7682-D79C-4A8A-80D2-079B90601445}"/>
+                <a16:creationId xmlns:a16="http://schemas.microsoft.com/office/drawing/2014/main" id="{40F0015D-4F13-49D0-BFE1-2318555C687D}"/>
               </a:ext>
             </a:extLst>
           </p:cNvPr>
@@ -3151,7 +3151,7 @@
           <p:cNvPr id="4" name="">
             <a:extLst xmlns:a="http://schemas.openxmlformats.org/drawingml/2006/main">
               <a:ext uri="{FF2B5EF4-FFF2-40B4-BE49-F238E27FC236}">
-                <a16:creationId xmlns:a16="http://schemas.microsoft.com/office/drawing/2014/main" id="{99CBE0BD-BC09-42E1-9368-5A2BC919B612}"/>
+                <a16:creationId xmlns:a16="http://schemas.microsoft.com/office/drawing/2014/main" id="{059754AD-34D7-4F6C-8DCD-EDDA314C84C0}"/>
               </a:ext>
             </a:extLst>
           </p:cNvPr>
@@ -3213,7 +3213,7 @@
           <p:cNvPr id="5" name="">
             <a:extLst xmlns:a="http://schemas.openxmlformats.org/drawingml/2006/main">
               <a:ext uri="{FF2B5EF4-FFF2-40B4-BE49-F238E27FC236}">
-                <a16:creationId xmlns:a16="http://schemas.microsoft.com/office/drawing/2014/main" id="{0FC7F314-D9B1-4628-A52C-A1AC13541824}"/>
+                <a16:creationId xmlns:a16="http://schemas.microsoft.com/office/drawing/2014/main" id="{29132DCC-A517-486E-A465-9B443F7142BD}"/>
               </a:ext>
             </a:extLst>
           </p:cNvPr>
@@ -3372,7 +3372,7 @@
           <p:nvPr/>
         </p:nvPicPr>
         <p:blipFill>
-          <a:blip xmlns:r="http://schemas.openxmlformats.org/officeDocument/2006/relationships" xmlns:a="http://schemas.openxmlformats.org/drawingml/2006/main" r:embed="R4125f3f802ec4f89"/>
+          <a:blip xmlns:r="http://schemas.openxmlformats.org/officeDocument/2006/relationships" xmlns:a="http://schemas.openxmlformats.org/drawingml/2006/main" r:embed="Rb8defb04a1e94ff3"/>
           <a:stretch xmlns:a="http://schemas.openxmlformats.org/drawingml/2006/main"/>
         </p:blipFill>
         <p:spPr>
@@ -3392,7 +3392,7 @@
           <p:cNvPr id="7" name="">
             <a:extLst xmlns:a="http://schemas.openxmlformats.org/drawingml/2006/main">
               <a:ext uri="{FF2B5EF4-FFF2-40B4-BE49-F238E27FC236}">
-                <a16:creationId xmlns:a16="http://schemas.microsoft.com/office/drawing/2014/main" id="{9A833908-3A4A-49CC-BDAC-7E980487232D}"/>
+                <a16:creationId xmlns:a16="http://schemas.microsoft.com/office/drawing/2014/main" id="{0A59D2D0-9612-4578-B8F2-C4D51F19DFAE}"/>
               </a:ext>
             </a:extLst>
           </p:cNvPr>
@@ -3452,7 +3452,7 @@
     </p:spTree>
     <p:extLst>
       <p:ext uri="{BB962C8B-B14F-4D97-AF65-F5344CB8AC3E}">
-        <p14:creationId xmlns:p14="http://schemas.microsoft.com/office/powerpoint/2010/main" val="421895276"/>
+        <p14:creationId xmlns:p14="http://schemas.microsoft.com/office/powerpoint/2010/main" val="377220041"/>
       </p:ext>
     </p:extLst>
   </p:cSld>
@@ -3483,7 +3483,7 @@
           <p:cNvPr id="8" name="">
             <a:extLst xmlns:a="http://schemas.openxmlformats.org/drawingml/2006/main">
               <a:ext uri="{FF2B5EF4-FFF2-40B4-BE49-F238E27FC236}">
-                <a16:creationId xmlns:a16="http://schemas.microsoft.com/office/drawing/2014/main" id="{E6868196-09BE-44A4-B653-5045F6E87D4C}"/>
+                <a16:creationId xmlns:a16="http://schemas.microsoft.com/office/drawing/2014/main" id="{200486AD-2C39-425A-997B-69A5469D9D74}"/>
               </a:ext>
             </a:extLst>
           </p:cNvPr>
@@ -3545,7 +3545,7 @@
           <p:cNvPr id="2" name="">
             <a:extLst xmlns:a="http://schemas.openxmlformats.org/drawingml/2006/main">
               <a:ext uri="{FF2B5EF4-FFF2-40B4-BE49-F238E27FC236}">
-                <a16:creationId xmlns:a16="http://schemas.microsoft.com/office/drawing/2014/main" id="{2D54E660-6810-4D12-BCCF-2485F62A053C}"/>
+                <a16:creationId xmlns:a16="http://schemas.microsoft.com/office/drawing/2014/main" id="{D80DDC6A-1B02-4CB4-95DC-25E560E260F0}"/>
               </a:ext>
             </a:extLst>
           </p:cNvPr>
@@ -3576,7 +3576,7 @@
           <p:cNvPr id="3" name="">
             <a:extLst xmlns:a="http://schemas.openxmlformats.org/drawingml/2006/main">
               <a:ext uri="{FF2B5EF4-FFF2-40B4-BE49-F238E27FC236}">
-                <a16:creationId xmlns:a16="http://schemas.microsoft.com/office/drawing/2014/main" id="{D441F845-A4B7-4399-B026-93928E8438E3}"/>
+                <a16:creationId xmlns:a16="http://schemas.microsoft.com/office/drawing/2014/main" id="{E0EBE701-7330-44C4-87D5-9E6EFADBEE7D}"/>
               </a:ext>
             </a:extLst>
           </p:cNvPr>
@@ -3638,7 +3638,7 @@
           <p:cNvPr id="4" name="">
             <a:extLst xmlns:a="http://schemas.openxmlformats.org/drawingml/2006/main">
               <a:ext uri="{FF2B5EF4-FFF2-40B4-BE49-F238E27FC236}">
-                <a16:creationId xmlns:a16="http://schemas.microsoft.com/office/drawing/2014/main" id="{39EEA965-4C74-4678-8DCC-77D63393497C}"/>
+                <a16:creationId xmlns:a16="http://schemas.microsoft.com/office/drawing/2014/main" id="{0A14F12F-9AB5-4011-9145-2A16AB0C8D44}"/>
               </a:ext>
             </a:extLst>
           </p:cNvPr>
@@ -3793,7 +3793,7 @@
           <p:cNvPr id="5" name="">
             <a:extLst xmlns:a="http://schemas.openxmlformats.org/drawingml/2006/main">
               <a:ext uri="{FF2B5EF4-FFF2-40B4-BE49-F238E27FC236}">
-                <a16:creationId xmlns:a16="http://schemas.microsoft.com/office/drawing/2014/main" id="{09E6EDD7-CDE5-40FF-9F50-7AD52FCE1A16}"/>
+                <a16:creationId xmlns:a16="http://schemas.microsoft.com/office/drawing/2014/main" id="{CDDA6C3F-ACB1-46CF-9EA0-641B20387B09}"/>
               </a:ext>
             </a:extLst>
           </p:cNvPr>
@@ -3845,7 +3845,7 @@
                 <a:ea typeface="Microsoft YaHei"/>
                 <a:cs typeface="Microsoft YaHei"/>
               </a:rPr>
-              <a:t>案例结果：DEP-01 完全断供约第 17 周见底，现有 3 批订单在第 8/12/16 周交付，先于断供点。</a:t>
+              <a:t>案例结果：DEP-01 第 17 周末库存恰好归零，第 18 周首次出现当周缺口；现有 3 批订单在第 8/12/16 周交付。</a:t>
             </a:r>
           </a:p>
         </p:txBody>
@@ -3859,7 +3859,7 @@
           <p:nvPr/>
         </p:nvPicPr>
         <p:blipFill>
-          <a:blip xmlns:r="http://schemas.openxmlformats.org/officeDocument/2006/relationships" xmlns:a="http://schemas.openxmlformats.org/drawingml/2006/main" r:embed="R852469964774488c"/>
+          <a:blip xmlns:r="http://schemas.openxmlformats.org/officeDocument/2006/relationships" xmlns:a="http://schemas.openxmlformats.org/drawingml/2006/main" r:embed="R32e77e4cd4d4481a"/>
           <a:stretch xmlns:a="http://schemas.openxmlformats.org/drawingml/2006/main"/>
         </p:blipFill>
         <p:spPr>
@@ -3879,7 +3879,7 @@
           <p:cNvPr id="7" name="">
             <a:extLst xmlns:a="http://schemas.openxmlformats.org/drawingml/2006/main">
               <a:ext uri="{FF2B5EF4-FFF2-40B4-BE49-F238E27FC236}">
-                <a16:creationId xmlns:a16="http://schemas.microsoft.com/office/drawing/2014/main" id="{1AAA3DCF-FD60-49BB-B0D7-B829578DB7FA}"/>
+                <a16:creationId xmlns:a16="http://schemas.microsoft.com/office/drawing/2014/main" id="{E7098FE4-4862-4C53-85F9-20C1C727B2EB}"/>
               </a:ext>
             </a:extLst>
           </p:cNvPr>
@@ -3939,7 +3939,7 @@
     </p:spTree>
     <p:extLst>
       <p:ext uri="{BB962C8B-B14F-4D97-AF65-F5344CB8AC3E}">
-        <p14:creationId xmlns:p14="http://schemas.microsoft.com/office/powerpoint/2010/main" val="461312779"/>
+        <p14:creationId xmlns:p14="http://schemas.microsoft.com/office/powerpoint/2010/main" val="1006776043"/>
       </p:ext>
     </p:extLst>
   </p:cSld>
@@ -3970,7 +3970,7 @@
           <p:cNvPr id="6" name="">
             <a:extLst xmlns:a="http://schemas.openxmlformats.org/drawingml/2006/main">
               <a:ext uri="{FF2B5EF4-FFF2-40B4-BE49-F238E27FC236}">
-                <a16:creationId xmlns:a16="http://schemas.microsoft.com/office/drawing/2014/main" id="{7242BD71-CD2D-44DF-8ECA-E8DD943B8468}"/>
+                <a16:creationId xmlns:a16="http://schemas.microsoft.com/office/drawing/2014/main" id="{E11559AF-3EBB-4135-94C8-FC65DB856626}"/>
               </a:ext>
             </a:extLst>
           </p:cNvPr>
@@ -4032,7 +4032,7 @@
           <p:cNvPr id="2" name="">
             <a:extLst xmlns:a="http://schemas.openxmlformats.org/drawingml/2006/main">
               <a:ext uri="{FF2B5EF4-FFF2-40B4-BE49-F238E27FC236}">
-                <a16:creationId xmlns:a16="http://schemas.microsoft.com/office/drawing/2014/main" id="{3A711467-A771-435D-AF3C-3FF1961459B7}"/>
+                <a16:creationId xmlns:a16="http://schemas.microsoft.com/office/drawing/2014/main" id="{AB5AED7E-AF9B-44D9-985A-ADF7E5BDF836}"/>
               </a:ext>
             </a:extLst>
           </p:cNvPr>
@@ -4063,7 +4063,7 @@
           <p:cNvPr id="3" name="">
             <a:extLst xmlns:a="http://schemas.openxmlformats.org/drawingml/2006/main">
               <a:ext uri="{FF2B5EF4-FFF2-40B4-BE49-F238E27FC236}">
-                <a16:creationId xmlns:a16="http://schemas.microsoft.com/office/drawing/2014/main" id="{012D6577-2725-4608-91AA-31E38592FF9F}"/>
+                <a16:creationId xmlns:a16="http://schemas.microsoft.com/office/drawing/2014/main" id="{A12775D8-9E83-454A-B598-79DEBA2AEEE2}"/>
               </a:ext>
             </a:extLst>
           </p:cNvPr>
@@ -4639,7 +4639,7 @@
           <p:cNvPr id="5" name="">
             <a:extLst xmlns:a="http://schemas.openxmlformats.org/drawingml/2006/main">
               <a:ext uri="{FF2B5EF4-FFF2-40B4-BE49-F238E27FC236}">
-                <a16:creationId xmlns:a16="http://schemas.microsoft.com/office/drawing/2014/main" id="{101990E0-53DD-4958-9B26-AA3CD90BCE30}"/>
+                <a16:creationId xmlns:a16="http://schemas.microsoft.com/office/drawing/2014/main" id="{7100A580-9B3D-425E-95ED-036B02E0A805}"/>
               </a:ext>
             </a:extLst>
           </p:cNvPr>
@@ -4691,7 +4691,7 @@
                 <a:ea typeface="Microsoft YaHei"/>
                 <a:cs typeface="Microsoft YaHei"/>
               </a:rPr>
-              <a:t>模拟推演：替代约第 18 周就绪，而断供第 17 周发生，组合方案更能避免断供。成本与周期为数量级示意。</a:t>
+              <a:t>模拟推演：替代约第 18 周就绪，与 DEP-01 首次缺口同一窗口；组合方案更能覆盖认证过渡期。成本与周期为数量级示意。</a:t>
             </a:r>
           </a:p>
         </p:txBody>
@@ -4699,7 +4699,7 @@
     </p:spTree>
     <p:extLst>
       <p:ext uri="{BB962C8B-B14F-4D97-AF65-F5344CB8AC3E}">
-        <p14:creationId xmlns:p14="http://schemas.microsoft.com/office/powerpoint/2010/main" val="329530659"/>
+        <p14:creationId xmlns:p14="http://schemas.microsoft.com/office/powerpoint/2010/main" val="409948259"/>
       </p:ext>
     </p:extLst>
   </p:cSld>
@@ -4730,7 +4730,7 @@
           <p:cNvPr id="7" name="">
             <a:extLst xmlns:a="http://schemas.openxmlformats.org/drawingml/2006/main">
               <a:ext uri="{FF2B5EF4-FFF2-40B4-BE49-F238E27FC236}">
-                <a16:creationId xmlns:a16="http://schemas.microsoft.com/office/drawing/2014/main" id="{A254B650-89EA-48AA-B016-17F31F3D2849}"/>
+                <a16:creationId xmlns:a16="http://schemas.microsoft.com/office/drawing/2014/main" id="{80C3341E-0D4B-4ED3-9DEE-C41FD902A547}"/>
               </a:ext>
             </a:extLst>
           </p:cNvPr>
@@ -4792,7 +4792,7 @@
           <p:cNvPr id="2" name="">
             <a:extLst xmlns:a="http://schemas.openxmlformats.org/drawingml/2006/main">
               <a:ext uri="{FF2B5EF4-FFF2-40B4-BE49-F238E27FC236}">
-                <a16:creationId xmlns:a16="http://schemas.microsoft.com/office/drawing/2014/main" id="{9BD07CE0-B37E-4D94-8CDD-634BA2706CD3}"/>
+                <a16:creationId xmlns:a16="http://schemas.microsoft.com/office/drawing/2014/main" id="{7D8786C6-0716-4FA2-84F4-09E019E9B6F7}"/>
               </a:ext>
             </a:extLst>
           </p:cNvPr>
@@ -4823,7 +4823,7 @@
           <p:cNvPr id="3" name="">
             <a:extLst xmlns:a="http://schemas.openxmlformats.org/drawingml/2006/main">
               <a:ext uri="{FF2B5EF4-FFF2-40B4-BE49-F238E27FC236}">
-                <a16:creationId xmlns:a16="http://schemas.microsoft.com/office/drawing/2014/main" id="{BCBABAF1-3785-4C69-9457-8BDDD337C701}"/>
+                <a16:creationId xmlns:a16="http://schemas.microsoft.com/office/drawing/2014/main" id="{E422FEC2-1F6A-4053-832A-A078D5B5F561}"/>
               </a:ext>
             </a:extLst>
           </p:cNvPr>
@@ -4885,7 +4885,7 @@
           <p:cNvPr id="4" name="">
             <a:extLst xmlns:a="http://schemas.openxmlformats.org/drawingml/2006/main">
               <a:ext uri="{FF2B5EF4-FFF2-40B4-BE49-F238E27FC236}">
-                <a16:creationId xmlns:a16="http://schemas.microsoft.com/office/drawing/2014/main" id="{738661FF-DA02-4582-8267-4CDCAE0FBD92}"/>
+                <a16:creationId xmlns:a16="http://schemas.microsoft.com/office/drawing/2014/main" id="{A8E0A0ED-E648-4B5A-89BB-5248826AF386}"/>
               </a:ext>
             </a:extLst>
           </p:cNvPr>
@@ -4940,7 +4940,7 @@
                 <a:ea typeface="Microsoft YaHei"/>
                 <a:cs typeface="Microsoft YaHei"/>
               </a:rPr>
-              <a:t>案例 A：日本编码器出口审查收紧，交期升至 20 周，推演出第 17 周断供，三批现有订单在断供前完成</a:t>
+              <a:t>案例 A：日本编码器出口审查收紧，交期升至 20 周，第 17 周末库存归零、第 18 周首次缺口，三批现有订单在此前完成</a:t>
             </a:r>
           </a:p>
           <a:p xmlns:a="http://schemas.openxmlformats.org/drawingml/2006/main">
@@ -5044,7 +5044,7 @@
           <p:nvPr/>
         </p:nvPicPr>
         <p:blipFill>
-          <a:blip xmlns:r="http://schemas.openxmlformats.org/officeDocument/2006/relationships" xmlns:a="http://schemas.openxmlformats.org/drawingml/2006/main" r:embed="Rd3d2b8ced54042a6"/>
+          <a:blip xmlns:r="http://schemas.openxmlformats.org/officeDocument/2006/relationships" xmlns:a="http://schemas.openxmlformats.org/drawingml/2006/main" r:embed="Re525bd3ecd6c4a5c"/>
           <a:stretch xmlns:a="http://schemas.openxmlformats.org/drawingml/2006/main"/>
         </p:blipFill>
         <p:spPr>
@@ -5064,7 +5064,7 @@
           <p:cNvPr id="6" name="">
             <a:extLst xmlns:a="http://schemas.openxmlformats.org/drawingml/2006/main">
               <a:ext uri="{FF2B5EF4-FFF2-40B4-BE49-F238E27FC236}">
-                <a16:creationId xmlns:a16="http://schemas.microsoft.com/office/drawing/2014/main" id="{31A6DCD9-2AFA-49B0-8B95-2ED5C77CC013}"/>
+                <a16:creationId xmlns:a16="http://schemas.microsoft.com/office/drawing/2014/main" id="{9BA6EEE9-F55E-4BFF-BF8F-C62D10FC6D4B}"/>
               </a:ext>
             </a:extLst>
           </p:cNvPr>
@@ -5124,7 +5124,7 @@
     </p:spTree>
     <p:extLst>
       <p:ext uri="{BB962C8B-B14F-4D97-AF65-F5344CB8AC3E}">
-        <p14:creationId xmlns:p14="http://schemas.microsoft.com/office/powerpoint/2010/main" val="258133775"/>
+        <p14:creationId xmlns:p14="http://schemas.microsoft.com/office/powerpoint/2010/main" val="1845962899"/>
       </p:ext>
     </p:extLst>
   </p:cSld>
@@ -5155,7 +5155,7 @@
           <p:cNvPr id="6" name="">
             <a:extLst xmlns:a="http://schemas.openxmlformats.org/drawingml/2006/main">
               <a:ext uri="{FF2B5EF4-FFF2-40B4-BE49-F238E27FC236}">
-                <a16:creationId xmlns:a16="http://schemas.microsoft.com/office/drawing/2014/main" id="{A9B1D5AF-0F30-4C34-A511-E24B5EC36D89}"/>
+                <a16:creationId xmlns:a16="http://schemas.microsoft.com/office/drawing/2014/main" id="{8E042033-852A-4B94-ABE2-4C7A6436BB11}"/>
               </a:ext>
             </a:extLst>
           </p:cNvPr>
@@ -5217,7 +5217,7 @@
           <p:cNvPr id="2" name="">
             <a:extLst xmlns:a="http://schemas.openxmlformats.org/drawingml/2006/main">
               <a:ext uri="{FF2B5EF4-FFF2-40B4-BE49-F238E27FC236}">
-                <a16:creationId xmlns:a16="http://schemas.microsoft.com/office/drawing/2014/main" id="{65B4775A-537B-411A-B1ED-1FC60314B6CF}"/>
+                <a16:creationId xmlns:a16="http://schemas.microsoft.com/office/drawing/2014/main" id="{36D86C08-0E09-4719-A2A6-A3C42547477C}"/>
               </a:ext>
             </a:extLst>
           </p:cNvPr>
@@ -5248,7 +5248,7 @@
           <p:cNvPr id="3" name="">
             <a:extLst xmlns:a="http://schemas.openxmlformats.org/drawingml/2006/main">
               <a:ext uri="{FF2B5EF4-FFF2-40B4-BE49-F238E27FC236}">
-                <a16:creationId xmlns:a16="http://schemas.microsoft.com/office/drawing/2014/main" id="{69313C98-85CF-4664-B024-CCA94D4487E3}"/>
+                <a16:creationId xmlns:a16="http://schemas.microsoft.com/office/drawing/2014/main" id="{4F54DFB0-6C34-46A5-825A-624403773A14}"/>
               </a:ext>
             </a:extLst>
           </p:cNvPr>
@@ -5310,7 +5310,7 @@
           <p:cNvPr id="4" name="">
             <a:extLst xmlns:a="http://schemas.openxmlformats.org/drawingml/2006/main">
               <a:ext uri="{FF2B5EF4-FFF2-40B4-BE49-F238E27FC236}">
-                <a16:creationId xmlns:a16="http://schemas.microsoft.com/office/drawing/2014/main" id="{FD326BF1-25EC-4AD7-9D83-653F52A56A28}"/>
+                <a16:creationId xmlns:a16="http://schemas.microsoft.com/office/drawing/2014/main" id="{1D50CB4B-1208-4CBA-A082-3F7B68C992B7}"/>
               </a:ext>
             </a:extLst>
           </p:cNvPr>
@@ -5465,7 +5465,7 @@
           <p:cNvPr id="5" name="">
             <a:extLst xmlns:a="http://schemas.openxmlformats.org/drawingml/2006/main">
               <a:ext uri="{FF2B5EF4-FFF2-40B4-BE49-F238E27FC236}">
-                <a16:creationId xmlns:a16="http://schemas.microsoft.com/office/drawing/2014/main" id="{F1081771-C1C1-4567-A566-E8420B1E2D7A}"/>
+                <a16:creationId xmlns:a16="http://schemas.microsoft.com/office/drawing/2014/main" id="{857CDC6E-C992-46E4-A086-851E06792E8C}"/>
               </a:ext>
             </a:extLst>
           </p:cNvPr>
@@ -5525,7 +5525,7 @@
     </p:spTree>
     <p:extLst>
       <p:ext uri="{BB962C8B-B14F-4D97-AF65-F5344CB8AC3E}">
-        <p14:creationId xmlns:p14="http://schemas.microsoft.com/office/powerpoint/2010/main" val="1601970310"/>
+        <p14:creationId xmlns:p14="http://schemas.microsoft.com/office/powerpoint/2010/main" val="1424225604"/>
       </p:ext>
     </p:extLst>
   </p:cSld>
@@ -5556,7 +5556,7 @@
           <p:cNvPr id="6" name="">
             <a:extLst xmlns:a="http://schemas.openxmlformats.org/drawingml/2006/main">
               <a:ext uri="{FF2B5EF4-FFF2-40B4-BE49-F238E27FC236}">
-                <a16:creationId xmlns:a16="http://schemas.microsoft.com/office/drawing/2014/main" id="{9E162D79-0E0A-4ACA-A474-D50DD7CF97B2}"/>
+                <a16:creationId xmlns:a16="http://schemas.microsoft.com/office/drawing/2014/main" id="{D00B657D-0DDE-4166-9D72-4AA6C877AA5E}"/>
               </a:ext>
             </a:extLst>
           </p:cNvPr>
@@ -5618,7 +5618,7 @@
           <p:cNvPr id="2" name="">
             <a:extLst xmlns:a="http://schemas.openxmlformats.org/drawingml/2006/main">
               <a:ext uri="{FF2B5EF4-FFF2-40B4-BE49-F238E27FC236}">
-                <a16:creationId xmlns:a16="http://schemas.microsoft.com/office/drawing/2014/main" id="{DEF25164-400B-434D-B9CB-99FC2508F76C}"/>
+                <a16:creationId xmlns:a16="http://schemas.microsoft.com/office/drawing/2014/main" id="{D4B2E9F3-3B5E-42A9-945B-EB3ED77C4C2B}"/>
               </a:ext>
             </a:extLst>
           </p:cNvPr>
@@ -5649,7 +5649,7 @@
           <p:cNvPr id="3" name="">
             <a:extLst xmlns:a="http://schemas.openxmlformats.org/drawingml/2006/main">
               <a:ext uri="{FF2B5EF4-FFF2-40B4-BE49-F238E27FC236}">
-                <a16:creationId xmlns:a16="http://schemas.microsoft.com/office/drawing/2014/main" id="{92C46714-8112-484B-93C4-E4CB5954BE99}"/>
+                <a16:creationId xmlns:a16="http://schemas.microsoft.com/office/drawing/2014/main" id="{A34E00DF-732B-4736-BBEE-7BAB60B8F108}"/>
               </a:ext>
             </a:extLst>
           </p:cNvPr>
@@ -5933,7 +5933,7 @@
           <p:cNvPr id="5" name="">
             <a:extLst xmlns:a="http://schemas.openxmlformats.org/drawingml/2006/main">
               <a:ext uri="{FF2B5EF4-FFF2-40B4-BE49-F238E27FC236}">
-                <a16:creationId xmlns:a16="http://schemas.microsoft.com/office/drawing/2014/main" id="{C34CEE85-8550-4E9A-82E9-3ED009A5DF4C}"/>
+                <a16:creationId xmlns:a16="http://schemas.microsoft.com/office/drawing/2014/main" id="{285A9F90-C0BA-4323-BB3A-9515A0B78D47}"/>
               </a:ext>
             </a:extLst>
           </p:cNvPr>
@@ -6086,7 +6086,7 @@
     </p:spTree>
     <p:extLst>
       <p:ext uri="{BB962C8B-B14F-4D97-AF65-F5344CB8AC3E}">
-        <p14:creationId xmlns:p14="http://schemas.microsoft.com/office/powerpoint/2010/main" val="173645400"/>
+        <p14:creationId xmlns:p14="http://schemas.microsoft.com/office/powerpoint/2010/main" val="209860413"/>
       </p:ext>
     </p:extLst>
   </p:cSld>
@@ -6117,7 +6117,7 @@
           <p:cNvPr id="7" name="">
             <a:extLst xmlns:a="http://schemas.openxmlformats.org/drawingml/2006/main">
               <a:ext uri="{FF2B5EF4-FFF2-40B4-BE49-F238E27FC236}">
-                <a16:creationId xmlns:a16="http://schemas.microsoft.com/office/drawing/2014/main" id="{8C42496A-2BCF-49EF-B5DB-A7F1749F32FB}"/>
+                <a16:creationId xmlns:a16="http://schemas.microsoft.com/office/drawing/2014/main" id="{3291D3C8-1E00-4571-844D-36AAF8764930}"/>
               </a:ext>
             </a:extLst>
           </p:cNvPr>
@@ -6179,7 +6179,7 @@
           <p:cNvPr id="2" name="">
             <a:extLst xmlns:a="http://schemas.openxmlformats.org/drawingml/2006/main">
               <a:ext uri="{FF2B5EF4-FFF2-40B4-BE49-F238E27FC236}">
-                <a16:creationId xmlns:a16="http://schemas.microsoft.com/office/drawing/2014/main" id="{F19BA938-4B91-41FE-8575-FAFC61C275CA}"/>
+                <a16:creationId xmlns:a16="http://schemas.microsoft.com/office/drawing/2014/main" id="{8B8AB853-9115-4949-A2E2-42C853EF9426}"/>
               </a:ext>
             </a:extLst>
           </p:cNvPr>
@@ -6210,7 +6210,7 @@
           <p:cNvPr id="3" name="">
             <a:extLst xmlns:a="http://schemas.openxmlformats.org/drawingml/2006/main">
               <a:ext uri="{FF2B5EF4-FFF2-40B4-BE49-F238E27FC236}">
-                <a16:creationId xmlns:a16="http://schemas.microsoft.com/office/drawing/2014/main" id="{1364C7E8-DFC1-41EF-B000-C996E3E54195}"/>
+                <a16:creationId xmlns:a16="http://schemas.microsoft.com/office/drawing/2014/main" id="{1CB5A2A5-8A8E-43D2-BF3A-06B0928B4397}"/>
               </a:ext>
             </a:extLst>
           </p:cNvPr>
@@ -6272,7 +6272,7 @@
           <p:cNvPr id="4" name="">
             <a:extLst xmlns:a="http://schemas.openxmlformats.org/drawingml/2006/main">
               <a:ext uri="{FF2B5EF4-FFF2-40B4-BE49-F238E27FC236}">
-                <a16:creationId xmlns:a16="http://schemas.microsoft.com/office/drawing/2014/main" id="{00AEA55D-A765-4712-851B-05F6D3A65ED9}"/>
+                <a16:creationId xmlns:a16="http://schemas.microsoft.com/office/drawing/2014/main" id="{58511550-1AE8-4BF5-80F7-0A6B66A1F3D2}"/>
               </a:ext>
             </a:extLst>
           </p:cNvPr>
@@ -6334,7 +6334,7 @@
           <p:cNvPr id="5" name="">
             <a:extLst xmlns:a="http://schemas.openxmlformats.org/drawingml/2006/main">
               <a:ext uri="{FF2B5EF4-FFF2-40B4-BE49-F238E27FC236}">
-                <a16:creationId xmlns:a16="http://schemas.microsoft.com/office/drawing/2014/main" id="{BAED9692-0567-4AEE-BE73-4EECF5485B2F}"/>
+                <a16:creationId xmlns:a16="http://schemas.microsoft.com/office/drawing/2014/main" id="{139680A7-370B-4F7E-94C1-C01804C0E2D3}"/>
               </a:ext>
             </a:extLst>
           </p:cNvPr>
@@ -6489,7 +6489,7 @@
           <p:cNvPr id="6" name="">
             <a:extLst xmlns:a="http://schemas.openxmlformats.org/drawingml/2006/main">
               <a:ext uri="{FF2B5EF4-FFF2-40B4-BE49-F238E27FC236}">
-                <a16:creationId xmlns:a16="http://schemas.microsoft.com/office/drawing/2014/main" id="{D45CB97D-91DC-434B-B4F4-C742968E5520}"/>
+                <a16:creationId xmlns:a16="http://schemas.microsoft.com/office/drawing/2014/main" id="{41DEDFE3-E23E-4999-BC17-22F64BA98351}"/>
               </a:ext>
             </a:extLst>
           </p:cNvPr>
@@ -6549,7 +6549,7 @@
     </p:spTree>
     <p:extLst>
       <p:ext uri="{BB962C8B-B14F-4D97-AF65-F5344CB8AC3E}">
-        <p14:creationId xmlns:p14="http://schemas.microsoft.com/office/powerpoint/2010/main" val="468761688"/>
+        <p14:creationId xmlns:p14="http://schemas.microsoft.com/office/powerpoint/2010/main" val="2098937195"/>
       </p:ext>
     </p:extLst>
   </p:cSld>
@@ -6580,7 +6580,7 @@
           <p:cNvPr id="5" name="">
             <a:extLst xmlns:a="http://schemas.openxmlformats.org/drawingml/2006/main">
               <a:ext uri="{FF2B5EF4-FFF2-40B4-BE49-F238E27FC236}">
-                <a16:creationId xmlns:a16="http://schemas.microsoft.com/office/drawing/2014/main" id="{88BC5EA2-91AB-45FB-B86E-BBADF9C82F51}"/>
+                <a16:creationId xmlns:a16="http://schemas.microsoft.com/office/drawing/2014/main" id="{91BD4652-FD85-4B94-BB3E-EB098848A74F}"/>
               </a:ext>
             </a:extLst>
           </p:cNvPr>
@@ -6642,7 +6642,7 @@
           <p:cNvPr id="2" name="">
             <a:extLst xmlns:a="http://schemas.openxmlformats.org/drawingml/2006/main">
               <a:ext uri="{FF2B5EF4-FFF2-40B4-BE49-F238E27FC236}">
-                <a16:creationId xmlns:a16="http://schemas.microsoft.com/office/drawing/2014/main" id="{CCD8D9F8-E129-40E4-85B6-BDB83472E803}"/>
+                <a16:creationId xmlns:a16="http://schemas.microsoft.com/office/drawing/2014/main" id="{058B1FBC-5339-4BF3-9438-8AB670D8ED27}"/>
               </a:ext>
             </a:extLst>
           </p:cNvPr>
@@ -6673,7 +6673,7 @@
           <p:cNvPr id="3" name="">
             <a:extLst xmlns:a="http://schemas.openxmlformats.org/drawingml/2006/main">
               <a:ext uri="{FF2B5EF4-FFF2-40B4-BE49-F238E27FC236}">
-                <a16:creationId xmlns:a16="http://schemas.microsoft.com/office/drawing/2014/main" id="{734163F4-DD1C-4719-8A75-418DFBB6D284}"/>
+                <a16:creationId xmlns:a16="http://schemas.microsoft.com/office/drawing/2014/main" id="{999DEDB4-7400-4668-92DB-34C6082B83F5}"/>
               </a:ext>
             </a:extLst>
           </p:cNvPr>
@@ -6735,7 +6735,7 @@
           <p:cNvPr id="4" name="">
             <a:extLst xmlns:a="http://schemas.openxmlformats.org/drawingml/2006/main">
               <a:ext uri="{FF2B5EF4-FFF2-40B4-BE49-F238E27FC236}">
-                <a16:creationId xmlns:a16="http://schemas.microsoft.com/office/drawing/2014/main" id="{15B2DC12-87BE-4340-B961-13691B833A32}"/>
+                <a16:creationId xmlns:a16="http://schemas.microsoft.com/office/drawing/2014/main" id="{73176146-1265-4F67-843D-C8EA12C9F23D}"/>
               </a:ext>
             </a:extLst>
           </p:cNvPr>
@@ -6918,7 +6918,7 @@
     </p:spTree>
     <p:extLst>
       <p:ext uri="{BB962C8B-B14F-4D97-AF65-F5344CB8AC3E}">
-        <p14:creationId xmlns:p14="http://schemas.microsoft.com/office/powerpoint/2010/main" val="909810748"/>
+        <p14:creationId xmlns:p14="http://schemas.microsoft.com/office/powerpoint/2010/main" val="1175347029"/>
       </p:ext>
     </p:extLst>
   </p:cSld>
@@ -6949,7 +6949,7 @@
           <p:cNvPr id="9" name="">
             <a:extLst xmlns:a="http://schemas.openxmlformats.org/drawingml/2006/main">
               <a:ext uri="{FF2B5EF4-FFF2-40B4-BE49-F238E27FC236}">
-                <a16:creationId xmlns:a16="http://schemas.microsoft.com/office/drawing/2014/main" id="{C6EBF901-684C-44DC-9E1E-9A8FAF46873E}"/>
+                <a16:creationId xmlns:a16="http://schemas.microsoft.com/office/drawing/2014/main" id="{6B85D656-C65D-4725-A308-E4A023A8FC63}"/>
               </a:ext>
             </a:extLst>
           </p:cNvPr>
@@ -7011,7 +7011,7 @@
           <p:cNvPr id="2" name="">
             <a:extLst xmlns:a="http://schemas.openxmlformats.org/drawingml/2006/main">
               <a:ext uri="{FF2B5EF4-FFF2-40B4-BE49-F238E27FC236}">
-                <a16:creationId xmlns:a16="http://schemas.microsoft.com/office/drawing/2014/main" id="{FBEAEC98-039F-44DC-B353-DC72A571A695}"/>
+                <a16:creationId xmlns:a16="http://schemas.microsoft.com/office/drawing/2014/main" id="{46D107D2-52A4-48F8-80EF-1AC520DFC984}"/>
               </a:ext>
             </a:extLst>
           </p:cNvPr>
@@ -7042,7 +7042,7 @@
           <p:cNvPr id="3" name="">
             <a:extLst xmlns:a="http://schemas.openxmlformats.org/drawingml/2006/main">
               <a:ext uri="{FF2B5EF4-FFF2-40B4-BE49-F238E27FC236}">
-                <a16:creationId xmlns:a16="http://schemas.microsoft.com/office/drawing/2014/main" id="{FB149A59-CDD6-42ED-BA73-98E03B9A7C7B}"/>
+                <a16:creationId xmlns:a16="http://schemas.microsoft.com/office/drawing/2014/main" id="{F1418716-B716-429F-954A-63A31272DFA4}"/>
               </a:ext>
             </a:extLst>
           </p:cNvPr>
@@ -7104,7 +7104,7 @@
           <p:cNvPr id="4" name="">
             <a:extLst xmlns:a="http://schemas.openxmlformats.org/drawingml/2006/main">
               <a:ext uri="{FF2B5EF4-FFF2-40B4-BE49-F238E27FC236}">
-                <a16:creationId xmlns:a16="http://schemas.microsoft.com/office/drawing/2014/main" id="{4A5A4566-93E2-4332-8B3B-13F1F6CC3B06}"/>
+                <a16:creationId xmlns:a16="http://schemas.microsoft.com/office/drawing/2014/main" id="{8E416495-0C3C-4356-A579-64DFADDB73F8}"/>
               </a:ext>
             </a:extLst>
           </p:cNvPr>
@@ -7166,7 +7166,7 @@
           <p:cNvPr id="5" name="">
             <a:extLst xmlns:a="http://schemas.openxmlformats.org/drawingml/2006/main">
               <a:ext uri="{FF2B5EF4-FFF2-40B4-BE49-F238E27FC236}">
-                <a16:creationId xmlns:a16="http://schemas.microsoft.com/office/drawing/2014/main" id="{4FA24B16-5422-4272-A9E1-4EC76FD8BC8B}"/>
+                <a16:creationId xmlns:a16="http://schemas.microsoft.com/office/drawing/2014/main" id="{06295C98-E7FE-4EA3-81D5-EE18F693B97E}"/>
               </a:ext>
             </a:extLst>
           </p:cNvPr>
@@ -7291,7 +7291,7 @@
           <p:cNvPr id="6" name="">
             <a:extLst xmlns:a="http://schemas.openxmlformats.org/drawingml/2006/main">
               <a:ext uri="{FF2B5EF4-FFF2-40B4-BE49-F238E27FC236}">
-                <a16:creationId xmlns:a16="http://schemas.microsoft.com/office/drawing/2014/main" id="{5770E50B-BCE7-47F1-A9B5-2ADA52D0148D}"/>
+                <a16:creationId xmlns:a16="http://schemas.microsoft.com/office/drawing/2014/main" id="{88B9F651-8084-4B26-AF54-5A2FBF46AFA0}"/>
               </a:ext>
             </a:extLst>
           </p:cNvPr>
@@ -7353,7 +7353,7 @@
           <p:cNvPr id="7" name="">
             <a:extLst xmlns:a="http://schemas.openxmlformats.org/drawingml/2006/main">
               <a:ext uri="{FF2B5EF4-FFF2-40B4-BE49-F238E27FC236}">
-                <a16:creationId xmlns:a16="http://schemas.microsoft.com/office/drawing/2014/main" id="{85824E17-72CA-4EAD-883A-F3C43E7333F9}"/>
+                <a16:creationId xmlns:a16="http://schemas.microsoft.com/office/drawing/2014/main" id="{E79ED39A-2976-48F1-9D76-A2CA04978157}"/>
               </a:ext>
             </a:extLst>
           </p:cNvPr>
@@ -7508,7 +7508,7 @@
           <p:cNvPr id="8" name="">
             <a:extLst xmlns:a="http://schemas.openxmlformats.org/drawingml/2006/main">
               <a:ext uri="{FF2B5EF4-FFF2-40B4-BE49-F238E27FC236}">
-                <a16:creationId xmlns:a16="http://schemas.microsoft.com/office/drawing/2014/main" id="{3BE52A5D-547C-444D-A2CA-A699C0D60BCC}"/>
+                <a16:creationId xmlns:a16="http://schemas.microsoft.com/office/drawing/2014/main" id="{9366767A-D940-439B-986D-7DA15ED5D488}"/>
               </a:ext>
             </a:extLst>
           </p:cNvPr>
@@ -7568,7 +7568,7 @@
     </p:spTree>
     <p:extLst>
       <p:ext uri="{BB962C8B-B14F-4D97-AF65-F5344CB8AC3E}">
-        <p14:creationId xmlns:p14="http://schemas.microsoft.com/office/powerpoint/2010/main" val="319651965"/>
+        <p14:creationId xmlns:p14="http://schemas.microsoft.com/office/powerpoint/2010/main" val="72505982"/>
       </p:ext>
     </p:extLst>
   </p:cSld>
@@ -7599,7 +7599,7 @@
           <p:cNvPr id="8" name="">
             <a:extLst xmlns:a="http://schemas.openxmlformats.org/drawingml/2006/main">
               <a:ext uri="{FF2B5EF4-FFF2-40B4-BE49-F238E27FC236}">
-                <a16:creationId xmlns:a16="http://schemas.microsoft.com/office/drawing/2014/main" id="{90F930F6-D2B6-4298-A3C7-92CE22C7BFC4}"/>
+                <a16:creationId xmlns:a16="http://schemas.microsoft.com/office/drawing/2014/main" id="{D2C8827A-1537-453E-9731-9F5EBC145D98}"/>
               </a:ext>
             </a:extLst>
           </p:cNvPr>
@@ -7661,7 +7661,7 @@
           <p:cNvPr id="2" name="">
             <a:extLst xmlns:a="http://schemas.openxmlformats.org/drawingml/2006/main">
               <a:ext uri="{FF2B5EF4-FFF2-40B4-BE49-F238E27FC236}">
-                <a16:creationId xmlns:a16="http://schemas.microsoft.com/office/drawing/2014/main" id="{BED2D488-4C0A-448D-BAB9-C70E4FC10D9C}"/>
+                <a16:creationId xmlns:a16="http://schemas.microsoft.com/office/drawing/2014/main" id="{B3BF15E5-7590-404A-8DA1-B9C1BD0A609D}"/>
               </a:ext>
             </a:extLst>
           </p:cNvPr>
@@ -7692,7 +7692,7 @@
           <p:cNvPr id="3" name="">
             <a:extLst xmlns:a="http://schemas.openxmlformats.org/drawingml/2006/main">
               <a:ext uri="{FF2B5EF4-FFF2-40B4-BE49-F238E27FC236}">
-                <a16:creationId xmlns:a16="http://schemas.microsoft.com/office/drawing/2014/main" id="{C590C4D7-B17A-4F39-9948-4B43E8795832}"/>
+                <a16:creationId xmlns:a16="http://schemas.microsoft.com/office/drawing/2014/main" id="{F62FB832-0219-4BA1-B449-9196793414C6}"/>
               </a:ext>
             </a:extLst>
           </p:cNvPr>
@@ -7754,7 +7754,7 @@
           <p:cNvPr id="4" name="">
             <a:extLst xmlns:a="http://schemas.openxmlformats.org/drawingml/2006/main">
               <a:ext uri="{FF2B5EF4-FFF2-40B4-BE49-F238E27FC236}">
-                <a16:creationId xmlns:a16="http://schemas.microsoft.com/office/drawing/2014/main" id="{8807E71F-002A-4055-90D2-7181FA734F0A}"/>
+                <a16:creationId xmlns:a16="http://schemas.microsoft.com/office/drawing/2014/main" id="{4779BD1F-66F9-42B5-8C25-D7732CA7765D}"/>
               </a:ext>
             </a:extLst>
           </p:cNvPr>
@@ -7816,7 +7816,7 @@
           <p:cNvPr id="5" name="">
             <a:extLst xmlns:a="http://schemas.openxmlformats.org/drawingml/2006/main">
               <a:ext uri="{FF2B5EF4-FFF2-40B4-BE49-F238E27FC236}">
-                <a16:creationId xmlns:a16="http://schemas.microsoft.com/office/drawing/2014/main" id="{D0830A34-6FDC-46B7-BAF3-A8844377B0BB}"/>
+                <a16:creationId xmlns:a16="http://schemas.microsoft.com/office/drawing/2014/main" id="{5A982E30-CD8B-4DAA-A8B1-704F0F113EEA}"/>
               </a:ext>
             </a:extLst>
           </p:cNvPr>
@@ -7971,7 +7971,7 @@
           <p:cNvPr id="6" name="">
             <a:extLst xmlns:a="http://schemas.openxmlformats.org/drawingml/2006/main">
               <a:ext uri="{FF2B5EF4-FFF2-40B4-BE49-F238E27FC236}">
-                <a16:creationId xmlns:a16="http://schemas.microsoft.com/office/drawing/2014/main" id="{D7E41EB4-2D11-44CA-9D1C-0AF0CAC79530}"/>
+                <a16:creationId xmlns:a16="http://schemas.microsoft.com/office/drawing/2014/main" id="{D48E2C5F-58F9-4A29-937D-BF9BEB76DCC4}"/>
               </a:ext>
             </a:extLst>
           </p:cNvPr>
@@ -8033,7 +8033,7 @@
           <p:cNvPr id="7" name="">
             <a:extLst xmlns:a="http://schemas.openxmlformats.org/drawingml/2006/main">
               <a:ext uri="{FF2B5EF4-FFF2-40B4-BE49-F238E27FC236}">
-                <a16:creationId xmlns:a16="http://schemas.microsoft.com/office/drawing/2014/main" id="{1F403599-A91C-499E-B8F8-1D49C5846E3B}"/>
+                <a16:creationId xmlns:a16="http://schemas.microsoft.com/office/drawing/2014/main" id="{07AB5C5D-FD5B-46CE-BDEC-0E6A6BD348CC}"/>
               </a:ext>
             </a:extLst>
           </p:cNvPr>
@@ -8186,7 +8186,7 @@
     </p:spTree>
     <p:extLst>
       <p:ext uri="{BB962C8B-B14F-4D97-AF65-F5344CB8AC3E}">
-        <p14:creationId xmlns:p14="http://schemas.microsoft.com/office/powerpoint/2010/main" val="313392751"/>
+        <p14:creationId xmlns:p14="http://schemas.microsoft.com/office/powerpoint/2010/main" val="1731548746"/>
       </p:ext>
     </p:extLst>
   </p:cSld>
@@ -8217,7 +8217,7 @@
           <p:cNvPr id="7" name="">
             <a:extLst xmlns:a="http://schemas.openxmlformats.org/drawingml/2006/main">
               <a:ext uri="{FF2B5EF4-FFF2-40B4-BE49-F238E27FC236}">
-                <a16:creationId xmlns:a16="http://schemas.microsoft.com/office/drawing/2014/main" id="{18000965-B002-489A-9173-930AED544A78}"/>
+                <a16:creationId xmlns:a16="http://schemas.microsoft.com/office/drawing/2014/main" id="{02A09DE4-DA9D-476C-AB76-9C33AAAFABF0}"/>
               </a:ext>
             </a:extLst>
           </p:cNvPr>
@@ -8279,7 +8279,7 @@
           <p:cNvPr id="2" name="">
             <a:extLst xmlns:a="http://schemas.openxmlformats.org/drawingml/2006/main">
               <a:ext uri="{FF2B5EF4-FFF2-40B4-BE49-F238E27FC236}">
-                <a16:creationId xmlns:a16="http://schemas.microsoft.com/office/drawing/2014/main" id="{5907D167-2FA4-48CF-8B3B-C56A2E853224}"/>
+                <a16:creationId xmlns:a16="http://schemas.microsoft.com/office/drawing/2014/main" id="{621705AF-BAEF-4E62-BF43-6C7C58E52035}"/>
               </a:ext>
             </a:extLst>
           </p:cNvPr>
@@ -8310,7 +8310,7 @@
           <p:cNvPr id="3" name="">
             <a:extLst xmlns:a="http://schemas.openxmlformats.org/drawingml/2006/main">
               <a:ext uri="{FF2B5EF4-FFF2-40B4-BE49-F238E27FC236}">
-                <a16:creationId xmlns:a16="http://schemas.microsoft.com/office/drawing/2014/main" id="{7DE8B580-AA32-4FE4-B01C-7E75614E2336}"/>
+                <a16:creationId xmlns:a16="http://schemas.microsoft.com/office/drawing/2014/main" id="{CB2FDCBF-0F65-4580-8589-45DD76D5D601}"/>
               </a:ext>
             </a:extLst>
           </p:cNvPr>
@@ -8372,7 +8372,7 @@
           <p:cNvPr id="4" name="">
             <a:extLst xmlns:a="http://schemas.openxmlformats.org/drawingml/2006/main">
               <a:ext uri="{FF2B5EF4-FFF2-40B4-BE49-F238E27FC236}">
-                <a16:creationId xmlns:a16="http://schemas.microsoft.com/office/drawing/2014/main" id="{45E0B07D-5A34-40E1-BB26-A0FB575F47D4}"/>
+                <a16:creationId xmlns:a16="http://schemas.microsoft.com/office/drawing/2014/main" id="{721B7AD0-1365-4EBC-8E18-84EFB50651BC}"/>
               </a:ext>
             </a:extLst>
           </p:cNvPr>
@@ -8656,7 +8656,7 @@
           <p:cNvPr id="6" name="">
             <a:extLst xmlns:a="http://schemas.openxmlformats.org/drawingml/2006/main">
               <a:ext uri="{FF2B5EF4-FFF2-40B4-BE49-F238E27FC236}">
-                <a16:creationId xmlns:a16="http://schemas.microsoft.com/office/drawing/2014/main" id="{CDDCD438-D2D1-4E96-A7A9-FA129B56B5DF}"/>
+                <a16:creationId xmlns:a16="http://schemas.microsoft.com/office/drawing/2014/main" id="{F80FECDB-EE4B-4C37-97BE-808B870FFD23}"/>
               </a:ext>
             </a:extLst>
           </p:cNvPr>
@@ -8716,7 +8716,7 @@
     </p:spTree>
     <p:extLst>
       <p:ext uri="{BB962C8B-B14F-4D97-AF65-F5344CB8AC3E}">
-        <p14:creationId xmlns:p14="http://schemas.microsoft.com/office/powerpoint/2010/main" val="1638356671"/>
+        <p14:creationId xmlns:p14="http://schemas.microsoft.com/office/powerpoint/2010/main" val="1074997062"/>
       </p:ext>
     </p:extLst>
   </p:cSld>
@@ -8747,7 +8747,7 @@
           <p:cNvPr id="21" name="">
             <a:extLst xmlns:a="http://schemas.openxmlformats.org/drawingml/2006/main">
               <a:ext uri="{FF2B5EF4-FFF2-40B4-BE49-F238E27FC236}">
-                <a16:creationId xmlns:a16="http://schemas.microsoft.com/office/drawing/2014/main" id="{1E544E1B-00C1-4788-B77A-10A3A8315A2B}"/>
+                <a16:creationId xmlns:a16="http://schemas.microsoft.com/office/drawing/2014/main" id="{F0FE015D-4627-42FF-976F-02F38BB37456}"/>
               </a:ext>
             </a:extLst>
           </p:cNvPr>
@@ -8809,7 +8809,7 @@
           <p:cNvPr id="2" name="">
             <a:extLst xmlns:a="http://schemas.openxmlformats.org/drawingml/2006/main">
               <a:ext uri="{FF2B5EF4-FFF2-40B4-BE49-F238E27FC236}">
-                <a16:creationId xmlns:a16="http://schemas.microsoft.com/office/drawing/2014/main" id="{C0729227-A9FE-402B-B2FD-221DD283A496}"/>
+                <a16:creationId xmlns:a16="http://schemas.microsoft.com/office/drawing/2014/main" id="{90186419-2984-455C-BC3F-410D17E3F1C0}"/>
               </a:ext>
             </a:extLst>
           </p:cNvPr>
@@ -8840,7 +8840,7 @@
           <p:cNvPr id="3" name="">
             <a:extLst xmlns:a="http://schemas.openxmlformats.org/drawingml/2006/main">
               <a:ext uri="{FF2B5EF4-FFF2-40B4-BE49-F238E27FC236}">
-                <a16:creationId xmlns:a16="http://schemas.microsoft.com/office/drawing/2014/main" id="{D7E3457A-D818-4206-9E56-7748B973318C}"/>
+                <a16:creationId xmlns:a16="http://schemas.microsoft.com/office/drawing/2014/main" id="{DEAAF08E-5732-4B22-B229-8BDA9E69FF02}"/>
               </a:ext>
             </a:extLst>
           </p:cNvPr>
@@ -8902,7 +8902,7 @@
           <p:cNvPr id="4" name="">
             <a:extLst xmlns:a="http://schemas.openxmlformats.org/drawingml/2006/main">
               <a:ext uri="{FF2B5EF4-FFF2-40B4-BE49-F238E27FC236}">
-                <a16:creationId xmlns:a16="http://schemas.microsoft.com/office/drawing/2014/main" id="{E2E0AF06-A405-40D1-A109-EF5E4D42ACF3}"/>
+                <a16:creationId xmlns:a16="http://schemas.microsoft.com/office/drawing/2014/main" id="{023D8C70-1615-40A9-9013-E2AF4FFA1F2E}"/>
               </a:ext>
             </a:extLst>
           </p:cNvPr>
@@ -8964,7 +8964,7 @@
           <p:cNvPr id="5" name="">
             <a:extLst xmlns:a="http://schemas.openxmlformats.org/drawingml/2006/main">
               <a:ext uri="{FF2B5EF4-FFF2-40B4-BE49-F238E27FC236}">
-                <a16:creationId xmlns:a16="http://schemas.microsoft.com/office/drawing/2014/main" id="{1F9BD2A3-C2CC-4D01-A541-E05353BADCB1}"/>
+                <a16:creationId xmlns:a16="http://schemas.microsoft.com/office/drawing/2014/main" id="{B4CADD88-41B8-48A8-AE69-38A60D953081}"/>
               </a:ext>
             </a:extLst>
           </p:cNvPr>
@@ -9026,7 +9026,7 @@
           <p:cNvPr id="6" name="">
             <a:extLst xmlns:a="http://schemas.openxmlformats.org/drawingml/2006/main">
               <a:ext uri="{FF2B5EF4-FFF2-40B4-BE49-F238E27FC236}">
-                <a16:creationId xmlns:a16="http://schemas.microsoft.com/office/drawing/2014/main" id="{74316511-FD9B-4D47-BC59-76294E00BEF4}"/>
+                <a16:creationId xmlns:a16="http://schemas.microsoft.com/office/drawing/2014/main" id="{11C3ADAC-B0E1-4FC7-B503-BCBA3599751C}"/>
               </a:ext>
             </a:extLst>
           </p:cNvPr>
@@ -9088,7 +9088,7 @@
           <p:cNvPr id="7" name="">
             <a:extLst xmlns:a="http://schemas.openxmlformats.org/drawingml/2006/main">
               <a:ext uri="{FF2B5EF4-FFF2-40B4-BE49-F238E27FC236}">
-                <a16:creationId xmlns:a16="http://schemas.microsoft.com/office/drawing/2014/main" id="{CAFF6611-96E5-4F44-A57F-8FDAE0A93C4B}"/>
+                <a16:creationId xmlns:a16="http://schemas.microsoft.com/office/drawing/2014/main" id="{BD3246DC-27DC-4ED4-945B-5C0108CA5144}"/>
               </a:ext>
             </a:extLst>
           </p:cNvPr>
@@ -9119,7 +9119,7 @@
           <p:cNvPr id="8" name="">
             <a:extLst xmlns:a="http://schemas.openxmlformats.org/drawingml/2006/main">
               <a:ext uri="{FF2B5EF4-FFF2-40B4-BE49-F238E27FC236}">
-                <a16:creationId xmlns:a16="http://schemas.microsoft.com/office/drawing/2014/main" id="{EAEF7417-B7AB-4A76-BAA9-43528E2D8172}"/>
+                <a16:creationId xmlns:a16="http://schemas.microsoft.com/office/drawing/2014/main" id="{58E783C8-8440-4943-AB71-592486A1EC93}"/>
               </a:ext>
             </a:extLst>
           </p:cNvPr>
@@ -9181,7 +9181,7 @@
           <p:cNvPr id="9" name="">
             <a:extLst xmlns:a="http://schemas.openxmlformats.org/drawingml/2006/main">
               <a:ext uri="{FF2B5EF4-FFF2-40B4-BE49-F238E27FC236}">
-                <a16:creationId xmlns:a16="http://schemas.microsoft.com/office/drawing/2014/main" id="{8A0359AD-8E1E-47FB-BF81-221119FB5138}"/>
+                <a16:creationId xmlns:a16="http://schemas.microsoft.com/office/drawing/2014/main" id="{BC272BFD-0AD9-41FC-B2C3-D5254DAC971D}"/>
               </a:ext>
             </a:extLst>
           </p:cNvPr>
@@ -9243,7 +9243,7 @@
           <p:cNvPr id="10" name="">
             <a:extLst xmlns:a="http://schemas.openxmlformats.org/drawingml/2006/main">
               <a:ext uri="{FF2B5EF4-FFF2-40B4-BE49-F238E27FC236}">
-                <a16:creationId xmlns:a16="http://schemas.microsoft.com/office/drawing/2014/main" id="{57419B00-880C-4459-8EB2-030B2279E519}"/>
+                <a16:creationId xmlns:a16="http://schemas.microsoft.com/office/drawing/2014/main" id="{22950F54-52FC-4446-8610-2AD305CF6DDF}"/>
               </a:ext>
             </a:extLst>
           </p:cNvPr>
@@ -9305,7 +9305,7 @@
           <p:cNvPr id="11" name="">
             <a:extLst xmlns:a="http://schemas.openxmlformats.org/drawingml/2006/main">
               <a:ext uri="{FF2B5EF4-FFF2-40B4-BE49-F238E27FC236}">
-                <a16:creationId xmlns:a16="http://schemas.microsoft.com/office/drawing/2014/main" id="{5357E87C-895E-4005-881C-0F6BF1072DD4}"/>
+                <a16:creationId xmlns:a16="http://schemas.microsoft.com/office/drawing/2014/main" id="{8F58FC2F-6C26-478B-B670-AD397CB059F1}"/>
               </a:ext>
             </a:extLst>
           </p:cNvPr>
@@ -9336,7 +9336,7 @@
           <p:cNvPr id="12" name="">
             <a:extLst xmlns:a="http://schemas.openxmlformats.org/drawingml/2006/main">
               <a:ext uri="{FF2B5EF4-FFF2-40B4-BE49-F238E27FC236}">
-                <a16:creationId xmlns:a16="http://schemas.microsoft.com/office/drawing/2014/main" id="{FB96945A-D191-437E-92EB-0827EEB3607F}"/>
+                <a16:creationId xmlns:a16="http://schemas.microsoft.com/office/drawing/2014/main" id="{ABFDA2B5-AB41-4793-BCE9-B8A900EB5072}"/>
               </a:ext>
             </a:extLst>
           </p:cNvPr>
@@ -9398,7 +9398,7 @@
           <p:cNvPr id="13" name="">
             <a:extLst xmlns:a="http://schemas.openxmlformats.org/drawingml/2006/main">
               <a:ext uri="{FF2B5EF4-FFF2-40B4-BE49-F238E27FC236}">
-                <a16:creationId xmlns:a16="http://schemas.microsoft.com/office/drawing/2014/main" id="{00955762-7013-4726-8C94-F2ADFE280CA4}"/>
+                <a16:creationId xmlns:a16="http://schemas.microsoft.com/office/drawing/2014/main" id="{063A496E-C101-4A9F-991B-01C9CE487F2D}"/>
               </a:ext>
             </a:extLst>
           </p:cNvPr>
@@ -9460,7 +9460,7 @@
           <p:cNvPr id="14" name="">
             <a:extLst xmlns:a="http://schemas.openxmlformats.org/drawingml/2006/main">
               <a:ext uri="{FF2B5EF4-FFF2-40B4-BE49-F238E27FC236}">
-                <a16:creationId xmlns:a16="http://schemas.microsoft.com/office/drawing/2014/main" id="{B9F0AF9C-EC3D-4510-B036-30726041D271}"/>
+                <a16:creationId xmlns:a16="http://schemas.microsoft.com/office/drawing/2014/main" id="{5C0DE21B-6EAE-40B1-A1C1-897510659A0E}"/>
               </a:ext>
             </a:extLst>
           </p:cNvPr>
@@ -9522,7 +9522,7 @@
           <p:cNvPr id="15" name="">
             <a:extLst xmlns:a="http://schemas.openxmlformats.org/drawingml/2006/main">
               <a:ext uri="{FF2B5EF4-FFF2-40B4-BE49-F238E27FC236}">
-                <a16:creationId xmlns:a16="http://schemas.microsoft.com/office/drawing/2014/main" id="{5583BC3C-00DC-4985-9487-342C821F0BC7}"/>
+                <a16:creationId xmlns:a16="http://schemas.microsoft.com/office/drawing/2014/main" id="{7FFE2722-80F0-4B61-81A0-B1FF3D759988}"/>
               </a:ext>
             </a:extLst>
           </p:cNvPr>
@@ -9553,7 +9553,7 @@
           <p:cNvPr id="16" name="">
             <a:extLst xmlns:a="http://schemas.openxmlformats.org/drawingml/2006/main">
               <a:ext uri="{FF2B5EF4-FFF2-40B4-BE49-F238E27FC236}">
-                <a16:creationId xmlns:a16="http://schemas.microsoft.com/office/drawing/2014/main" id="{FDB79303-0094-486D-A7F5-3687E20B4C05}"/>
+                <a16:creationId xmlns:a16="http://schemas.microsoft.com/office/drawing/2014/main" id="{A6E82DE6-230D-41C9-A134-1BC1CBEED9DD}"/>
               </a:ext>
             </a:extLst>
           </p:cNvPr>
@@ -9615,7 +9615,7 @@
           <p:cNvPr id="17" name="">
             <a:extLst xmlns:a="http://schemas.openxmlformats.org/drawingml/2006/main">
               <a:ext uri="{FF2B5EF4-FFF2-40B4-BE49-F238E27FC236}">
-                <a16:creationId xmlns:a16="http://schemas.microsoft.com/office/drawing/2014/main" id="{5F16F019-1083-4F24-82C7-995D199CA064}"/>
+                <a16:creationId xmlns:a16="http://schemas.microsoft.com/office/drawing/2014/main" id="{E3F547A7-5803-4A5D-B0CF-604FCD1E2C34}"/>
               </a:ext>
             </a:extLst>
           </p:cNvPr>
@@ -9677,7 +9677,7 @@
           <p:cNvPr id="18" name="">
             <a:extLst xmlns:a="http://schemas.openxmlformats.org/drawingml/2006/main">
               <a:ext uri="{FF2B5EF4-FFF2-40B4-BE49-F238E27FC236}">
-                <a16:creationId xmlns:a16="http://schemas.microsoft.com/office/drawing/2014/main" id="{055FDED4-C77A-4463-934F-288846CFA737}"/>
+                <a16:creationId xmlns:a16="http://schemas.microsoft.com/office/drawing/2014/main" id="{8F2371CC-836A-4D88-85D2-9DACC4FE4B24}"/>
               </a:ext>
             </a:extLst>
           </p:cNvPr>
@@ -9739,7 +9739,7 @@
           <p:cNvPr id="19" name="">
             <a:extLst xmlns:a="http://schemas.openxmlformats.org/drawingml/2006/main">
               <a:ext uri="{FF2B5EF4-FFF2-40B4-BE49-F238E27FC236}">
-                <a16:creationId xmlns:a16="http://schemas.microsoft.com/office/drawing/2014/main" id="{B3C500DE-69E9-46C3-994E-B7D7A1DEA274}"/>
+                <a16:creationId xmlns:a16="http://schemas.microsoft.com/office/drawing/2014/main" id="{D3010BA9-6C8D-4F38-A624-7C116190909E}"/>
               </a:ext>
             </a:extLst>
           </p:cNvPr>
@@ -9801,7 +9801,7 @@
           <p:cNvPr id="20" name="">
             <a:extLst xmlns:a="http://schemas.openxmlformats.org/drawingml/2006/main">
               <a:ext uri="{FF2B5EF4-FFF2-40B4-BE49-F238E27FC236}">
-                <a16:creationId xmlns:a16="http://schemas.microsoft.com/office/drawing/2014/main" id="{BABDD20C-C477-458E-BCBD-53094CC45181}"/>
+                <a16:creationId xmlns:a16="http://schemas.microsoft.com/office/drawing/2014/main" id="{3C9249BA-F382-47D6-9EC7-4F98610ADF28}"/>
               </a:ext>
             </a:extLst>
           </p:cNvPr>
@@ -9864,7 +9864,7 @@
     </p:spTree>
     <p:extLst>
       <p:ext uri="{BB962C8B-B14F-4D97-AF65-F5344CB8AC3E}">
-        <p14:creationId xmlns:p14="http://schemas.microsoft.com/office/powerpoint/2010/main" val="504393689"/>
+        <p14:creationId xmlns:p14="http://schemas.microsoft.com/office/powerpoint/2010/main" val="1043508529"/>
       </p:ext>
     </p:extLst>
   </p:cSld>
@@ -9895,7 +9895,7 @@
           <p:cNvPr id="9" name="">
             <a:extLst xmlns:a="http://schemas.openxmlformats.org/drawingml/2006/main">
               <a:ext uri="{FF2B5EF4-FFF2-40B4-BE49-F238E27FC236}">
-                <a16:creationId xmlns:a16="http://schemas.microsoft.com/office/drawing/2014/main" id="{E51E02AC-3207-495E-9F7F-B878044619DE}"/>
+                <a16:creationId xmlns:a16="http://schemas.microsoft.com/office/drawing/2014/main" id="{79D3CCCF-3C77-4C15-80CF-D13E2A5D113E}"/>
               </a:ext>
             </a:extLst>
           </p:cNvPr>
@@ -9957,7 +9957,7 @@
           <p:cNvPr id="2" name="">
             <a:extLst xmlns:a="http://schemas.openxmlformats.org/drawingml/2006/main">
               <a:ext uri="{FF2B5EF4-FFF2-40B4-BE49-F238E27FC236}">
-                <a16:creationId xmlns:a16="http://schemas.microsoft.com/office/drawing/2014/main" id="{F8B01338-C718-4AAA-8239-6A1AD428AD32}"/>
+                <a16:creationId xmlns:a16="http://schemas.microsoft.com/office/drawing/2014/main" id="{8181B200-07FD-4855-B6C9-785ECF2B3635}"/>
               </a:ext>
             </a:extLst>
           </p:cNvPr>
@@ -9988,7 +9988,7 @@
           <p:cNvPr id="3" name="">
             <a:extLst xmlns:a="http://schemas.openxmlformats.org/drawingml/2006/main">
               <a:ext uri="{FF2B5EF4-FFF2-40B4-BE49-F238E27FC236}">
-                <a16:creationId xmlns:a16="http://schemas.microsoft.com/office/drawing/2014/main" id="{3031231C-F457-4529-AF62-A57AFB98D82E}"/>
+                <a16:creationId xmlns:a16="http://schemas.microsoft.com/office/drawing/2014/main" id="{E53E93CD-2972-47E2-811B-3C3B3975D145}"/>
               </a:ext>
             </a:extLst>
           </p:cNvPr>
@@ -10050,7 +10050,7 @@
           <p:cNvPr id="4" name="">
             <a:extLst xmlns:a="http://schemas.openxmlformats.org/drawingml/2006/main">
               <a:ext uri="{FF2B5EF4-FFF2-40B4-BE49-F238E27FC236}">
-                <a16:creationId xmlns:a16="http://schemas.microsoft.com/office/drawing/2014/main" id="{C3A4D5DC-892A-491F-AE42-BD9B41BB1B5C}"/>
+                <a16:creationId xmlns:a16="http://schemas.microsoft.com/office/drawing/2014/main" id="{14017864-F3D3-4015-8521-E2A91801B552}"/>
               </a:ext>
             </a:extLst>
           </p:cNvPr>
@@ -10112,7 +10112,7 @@
           <p:cNvPr id="5" name="">
             <a:extLst xmlns:a="http://schemas.openxmlformats.org/drawingml/2006/main">
               <a:ext uri="{FF2B5EF4-FFF2-40B4-BE49-F238E27FC236}">
-                <a16:creationId xmlns:a16="http://schemas.microsoft.com/office/drawing/2014/main" id="{AA61B137-E0F3-431C-B772-E2A58BF74C72}"/>
+                <a16:creationId xmlns:a16="http://schemas.microsoft.com/office/drawing/2014/main" id="{25B7419C-2125-45A9-AF0A-0FC96766D309}"/>
               </a:ext>
             </a:extLst>
           </p:cNvPr>
@@ -10237,7 +10237,7 @@
           <p:cNvPr id="6" name="">
             <a:extLst xmlns:a="http://schemas.openxmlformats.org/drawingml/2006/main">
               <a:ext uri="{FF2B5EF4-FFF2-40B4-BE49-F238E27FC236}">
-                <a16:creationId xmlns:a16="http://schemas.microsoft.com/office/drawing/2014/main" id="{B1035A6F-1AD3-4D85-9880-55A9CAB71AE2}"/>
+                <a16:creationId xmlns:a16="http://schemas.microsoft.com/office/drawing/2014/main" id="{CBBFC60D-3CBE-4E70-ADF4-2488C3946B53}"/>
               </a:ext>
             </a:extLst>
           </p:cNvPr>
@@ -10299,7 +10299,7 @@
           <p:cNvPr id="7" name="">
             <a:extLst xmlns:a="http://schemas.openxmlformats.org/drawingml/2006/main">
               <a:ext uri="{FF2B5EF4-FFF2-40B4-BE49-F238E27FC236}">
-                <a16:creationId xmlns:a16="http://schemas.microsoft.com/office/drawing/2014/main" id="{C04AD034-9F6D-4ACD-A305-E6B60F7571D0}"/>
+                <a16:creationId xmlns:a16="http://schemas.microsoft.com/office/drawing/2014/main" id="{27B9C0DF-478E-4256-BF3A-421562302B9C}"/>
               </a:ext>
             </a:extLst>
           </p:cNvPr>
@@ -10424,7 +10424,7 @@
           <p:cNvPr id="8" name="">
             <a:extLst xmlns:a="http://schemas.openxmlformats.org/drawingml/2006/main">
               <a:ext uri="{FF2B5EF4-FFF2-40B4-BE49-F238E27FC236}">
-                <a16:creationId xmlns:a16="http://schemas.microsoft.com/office/drawing/2014/main" id="{9F464975-DCB9-460E-B5D4-C4E74CEC6305}"/>
+                <a16:creationId xmlns:a16="http://schemas.microsoft.com/office/drawing/2014/main" id="{50642970-C13B-418C-9520-8ED7AA9DA299}"/>
               </a:ext>
             </a:extLst>
           </p:cNvPr>
@@ -10484,7 +10484,7 @@
     </p:spTree>
     <p:extLst>
       <p:ext uri="{BB962C8B-B14F-4D97-AF65-F5344CB8AC3E}">
-        <p14:creationId xmlns:p14="http://schemas.microsoft.com/office/powerpoint/2010/main" val="1368878171"/>
+        <p14:creationId xmlns:p14="http://schemas.microsoft.com/office/powerpoint/2010/main" val="1490980685"/>
       </p:ext>
     </p:extLst>
   </p:cSld>
@@ -10515,7 +10515,7 @@
           <p:cNvPr id="7" name="">
             <a:extLst xmlns:a="http://schemas.openxmlformats.org/drawingml/2006/main">
               <a:ext uri="{FF2B5EF4-FFF2-40B4-BE49-F238E27FC236}">
-                <a16:creationId xmlns:a16="http://schemas.microsoft.com/office/drawing/2014/main" id="{EDDD6C9C-4381-41AE-AA4C-CB8B0C3852FB}"/>
+                <a16:creationId xmlns:a16="http://schemas.microsoft.com/office/drawing/2014/main" id="{BF1BBCE0-1379-4CF9-A6D1-A654D01535C6}"/>
               </a:ext>
             </a:extLst>
           </p:cNvPr>
@@ -10577,7 +10577,7 @@
           <p:cNvPr id="2" name="">
             <a:extLst xmlns:a="http://schemas.openxmlformats.org/drawingml/2006/main">
               <a:ext uri="{FF2B5EF4-FFF2-40B4-BE49-F238E27FC236}">
-                <a16:creationId xmlns:a16="http://schemas.microsoft.com/office/drawing/2014/main" id="{171B4EE5-4C4C-4DA4-B91A-C94C605DEEAD}"/>
+                <a16:creationId xmlns:a16="http://schemas.microsoft.com/office/drawing/2014/main" id="{91F5EB40-51E6-4AC0-9A7A-E6B8080F2E9E}"/>
               </a:ext>
             </a:extLst>
           </p:cNvPr>
@@ -10608,7 +10608,7 @@
           <p:cNvPr id="3" name="">
             <a:extLst xmlns:a="http://schemas.openxmlformats.org/drawingml/2006/main">
               <a:ext uri="{FF2B5EF4-FFF2-40B4-BE49-F238E27FC236}">
-                <a16:creationId xmlns:a16="http://schemas.microsoft.com/office/drawing/2014/main" id="{FC47450B-4F8F-4225-92F5-CA2B24D8203C}"/>
+                <a16:creationId xmlns:a16="http://schemas.microsoft.com/office/drawing/2014/main" id="{1354BA5F-341C-49A6-B414-FFDC67A10C38}"/>
               </a:ext>
             </a:extLst>
           </p:cNvPr>
@@ -10670,7 +10670,7 @@
           <p:cNvPr id="4" name="">
             <a:extLst xmlns:a="http://schemas.openxmlformats.org/drawingml/2006/main">
               <a:ext uri="{FF2B5EF4-FFF2-40B4-BE49-F238E27FC236}">
-                <a16:creationId xmlns:a16="http://schemas.microsoft.com/office/drawing/2014/main" id="{BD9C416F-C998-414A-B62C-0A16771D9F1B}"/>
+                <a16:creationId xmlns:a16="http://schemas.microsoft.com/office/drawing/2014/main" id="{B5C75228-34CE-44DA-A871-E75EFD21E11D}"/>
               </a:ext>
             </a:extLst>
           </p:cNvPr>
@@ -10829,7 +10829,7 @@
           <p:nvPr/>
         </p:nvPicPr>
         <p:blipFill>
-          <a:blip xmlns:r="http://schemas.openxmlformats.org/officeDocument/2006/relationships" xmlns:a="http://schemas.openxmlformats.org/drawingml/2006/main" r:embed="Rad4621e62d374ce4"/>
+          <a:blip xmlns:r="http://schemas.openxmlformats.org/officeDocument/2006/relationships" xmlns:a="http://schemas.openxmlformats.org/drawingml/2006/main" r:embed="R110d04fad7574b7d"/>
           <a:stretch xmlns:a="http://schemas.openxmlformats.org/drawingml/2006/main"/>
         </p:blipFill>
         <p:spPr>
@@ -10849,7 +10849,7 @@
           <p:cNvPr id="6" name="">
             <a:extLst xmlns:a="http://schemas.openxmlformats.org/drawingml/2006/main">
               <a:ext uri="{FF2B5EF4-FFF2-40B4-BE49-F238E27FC236}">
-                <a16:creationId xmlns:a16="http://schemas.microsoft.com/office/drawing/2014/main" id="{9738C129-633F-42A4-B8FE-FB86EB27A757}"/>
+                <a16:creationId xmlns:a16="http://schemas.microsoft.com/office/drawing/2014/main" id="{953CD871-F04D-4412-B6D6-DFA30AE4390E}"/>
               </a:ext>
             </a:extLst>
           </p:cNvPr>
@@ -10909,7 +10909,7 @@
     </p:spTree>
     <p:extLst>
       <p:ext uri="{BB962C8B-B14F-4D97-AF65-F5344CB8AC3E}">
-        <p14:creationId xmlns:p14="http://schemas.microsoft.com/office/powerpoint/2010/main" val="737192392"/>
+        <p14:creationId xmlns:p14="http://schemas.microsoft.com/office/powerpoint/2010/main" val="762901142"/>
       </p:ext>
     </p:extLst>
   </p:cSld>
